--- a/system-design-101/vi/lessons/sd-05-005/slides/sd-05-005.pptx
+++ b/system-design-101/vi/lessons/sd-05-005/slides/sd-05-005.pptx
@@ -1790,7 +1790,7 @@
         <p:spPr>
           <a:xfrm>
             <a:off x="914400" y="1428750"/>
-            <a:ext cx="16459200" cy="2190750"/>
+            <a:ext cx="16459200" cy="3600450"/>
           </a:xfrm>
           <a:prstGeom prst="rect">
             <a:avLst/>
@@ -1799,17 +1799,17 @@
           <a:ln/>
         </p:spPr>
         <p:txBody>
-          <a:bodyPr wrap="square" lIns="0" tIns="57799" rIns="0" bIns="-57799" rtlCol="0" anchor="t"/>
+          <a:bodyPr wrap="square" lIns="0" tIns="69437" rIns="0" bIns="-69437" rtlCol="0" anchor="t"/>
           <a:lstStyle/>
           <a:p>
             <a:pPr algn="l" indent="0" marL="0">
               <a:lnSpc>
-                <a:spcPts val="7079"/>
+                <a:spcPts val="8505"/>
               </a:lnSpc>
               <a:buNone/>
             </a:pPr>
             <a:r>
-              <a:rPr lang="en-US" sz="6742" dirty="0" spc="4" kern="0">
+              <a:rPr lang="en-US" sz="8100" dirty="0" spc="11" kern="0">
                 <a:solidFill>
                   <a:srgbClr val="F3EEE3"/>
                 </a:solidFill>
@@ -1820,7 +1820,7 @@
               <a:t>Ôn</a:t>
             </a:r>
             <a:r>
-              <a:rPr lang="en-US" sz="6742" dirty="0" spc="3" kern="0">
+              <a:rPr lang="en-US" sz="8100" dirty="0" spc="3" kern="0">
                 <a:solidFill>
                   <a:srgbClr val="F3EEE3"/>
                 </a:solidFill>
@@ -1831,7 +1831,7 @@
               <a:t> phỏng</a:t>
             </a:r>
             <a:r>
-              <a:rPr lang="en-US" sz="6742" dirty="0" spc="-53" kern="0">
+              <a:rPr lang="en-US" sz="8100" dirty="0" spc="-65" kern="0">
                 <a:solidFill>
                   <a:srgbClr val="F3EEE3"/>
                 </a:solidFill>
@@ -1842,7 +1842,7 @@
               <a:t> vấn</a:t>
             </a:r>
             <a:r>
-              <a:rPr lang="en-US" sz="6742" dirty="0" spc="0" kern="0">
+              <a:rPr lang="en-US" sz="8100" dirty="0" spc="-3" kern="0">
                 <a:solidFill>
                   <a:srgbClr val="F3EEE3"/>
                 </a:solidFill>
@@ -1853,7 +1853,7 @@
               <a:t> kỹ</a:t>
             </a:r>
             <a:r>
-              <a:rPr lang="en-US" sz="6742" dirty="0" spc="11" kern="0">
+              <a:rPr lang="en-US" sz="8100" dirty="0" spc="10" kern="0">
                 <a:solidFill>
                   <a:srgbClr val="F3EEE3"/>
                 </a:solidFill>
@@ -1864,7 +1864,7 @@
               <a:t> thuật:</a:t>
             </a:r>
             <a:r>
-              <a:rPr lang="en-US" sz="6742" dirty="0" spc="3" kern="0">
+              <a:rPr lang="en-US" sz="8100" dirty="0" spc="1" kern="0">
                 <a:solidFill>
                   <a:srgbClr val="F3EEE3"/>
                 </a:solidFill>
@@ -1875,7 +1875,7 @@
               <a:t> từ</a:t>
             </a:r>
             <a:r>
-              <a:rPr lang="en-US" sz="6742" dirty="0" spc="1" kern="0">
+              <a:rPr lang="en-US" sz="8100" dirty="0" spc="0" kern="0">
                 <a:solidFill>
                   <a:srgbClr val="F3EEE3"/>
                 </a:solidFill>
@@ -1886,7 +1886,7 @@
               <a:t> danh</a:t>
             </a:r>
             <a:r>
-              <a:rPr lang="en-US" sz="6742" dirty="0" spc="0" kern="0">
+              <a:rPr lang="en-US" sz="8100" dirty="0" spc="-1" kern="0">
                 <a:solidFill>
                   <a:srgbClr val="F3EEE3"/>
                 </a:solidFill>
@@ -1897,7 +1897,7 @@
               <a:t> sách</a:t>
             </a:r>
             <a:r>
-              <a:rPr lang="en-US" sz="6742" dirty="0" spc="-2" kern="0">
+              <a:rPr lang="en-US" sz="8100" dirty="0" spc="-7" kern="0">
                 <a:solidFill>
                   <a:srgbClr val="F3EEE3"/>
                 </a:solidFill>
@@ -1908,7 +1908,7 @@
               <a:t> tài</a:t>
             </a:r>
             <a:r>
-              <a:rPr lang="en-US" sz="6742" dirty="0" spc="7" kern="0">
+              <a:rPr lang="en-US" sz="8100" dirty="0" spc="2" kern="0">
                 <a:solidFill>
                   <a:srgbClr val="F3EEE3"/>
                 </a:solidFill>
@@ -1919,7 +1919,7 @@
               <a:t> liệu</a:t>
             </a:r>
             <a:r>
-              <a:rPr lang="en-US" sz="6742" dirty="0" spc="18" kern="0">
+              <a:rPr lang="en-US" sz="8100" dirty="0" spc="19" kern="0">
                 <a:solidFill>
                   <a:srgbClr val="F3EEE3"/>
                 </a:solidFill>
@@ -1930,7 +1930,7 @@
               <a:t> đến</a:t>
             </a:r>
             <a:r>
-              <a:rPr lang="en-US" sz="6742" dirty="0" spc="-52" kern="0">
+              <a:rPr lang="en-US" sz="8100" dirty="0" spc="-66" kern="0">
                 <a:solidFill>
                   <a:srgbClr val="F3EEE3"/>
                 </a:solidFill>
@@ -1941,7 +1941,7 @@
               <a:t> kế</a:t>
             </a:r>
             <a:r>
-              <a:rPr lang="en-US" sz="6742" dirty="0" spc="-5" kern="0">
+              <a:rPr lang="en-US" sz="8100" dirty="0" spc="-6" kern="0">
                 <a:solidFill>
                   <a:srgbClr val="F3EEE3"/>
                 </a:solidFill>
@@ -1952,7 +1952,7 @@
               <a:t> hoạch</a:t>
             </a:r>
             <a:r>
-              <a:rPr lang="en-US" sz="6742" dirty="0" spc="3" kern="0">
+              <a:rPr lang="en-US" sz="8100" dirty="0" spc="2" kern="0">
                 <a:solidFill>
                   <a:srgbClr val="F3EEE3"/>
                 </a:solidFill>
@@ -1962,7 +1962,7 @@
               </a:rPr>
               <a:t> luyện</a:t>
             </a:r>
-            <a:endParaRPr lang="en-US" sz="6742" dirty="0"/>
+            <a:endParaRPr lang="en-US" sz="8100" dirty="0"/>
           </a:p>
         </p:txBody>
       </p:sp>
@@ -1974,7 +1974,7 @@
         </p:nvSpPr>
         <p:spPr>
           <a:xfrm>
-            <a:off x="914400" y="3905250"/>
+            <a:off x="914400" y="5048250"/>
             <a:ext cx="16459200" cy="571500"/>
           </a:xfrm>
           <a:prstGeom prst="rect">
@@ -2112,7 +2112,7 @@
         </p:nvSpPr>
         <p:spPr>
           <a:xfrm>
-            <a:off x="914400" y="5334000"/>
+            <a:off x="914400" y="6096000"/>
             <a:ext cx="4000500" cy="2476500"/>
           </a:xfrm>
           <a:prstGeom prst="roundRect">
@@ -2139,7 +2139,7 @@
         </p:nvSpPr>
         <p:spPr>
           <a:xfrm>
-            <a:off x="1219200" y="5572125"/>
+            <a:off x="1219200" y="6334125"/>
             <a:ext cx="3390900" cy="857250"/>
           </a:xfrm>
           <a:prstGeom prst="rect">
@@ -2178,7 +2178,7 @@
         </p:nvSpPr>
         <p:spPr>
           <a:xfrm>
-            <a:off x="1219200" y="6572250"/>
+            <a:off x="1219200" y="7334250"/>
             <a:ext cx="3390900" cy="1047750"/>
           </a:xfrm>
           <a:prstGeom prst="rect">
@@ -2275,7 +2275,7 @@
         </p:nvSpPr>
         <p:spPr>
           <a:xfrm>
-            <a:off x="5143500" y="5334000"/>
+            <a:off x="5143500" y="6096000"/>
             <a:ext cx="4000500" cy="2476500"/>
           </a:xfrm>
           <a:prstGeom prst="roundRect">
@@ -2302,7 +2302,7 @@
         </p:nvSpPr>
         <p:spPr>
           <a:xfrm>
-            <a:off x="5448300" y="5572125"/>
+            <a:off x="5448300" y="6334125"/>
             <a:ext cx="3390900" cy="857250"/>
           </a:xfrm>
           <a:prstGeom prst="rect">
@@ -2341,7 +2341,7 @@
         </p:nvSpPr>
         <p:spPr>
           <a:xfrm>
-            <a:off x="5448300" y="6572250"/>
+            <a:off x="5448300" y="7334250"/>
             <a:ext cx="3390900" cy="1047750"/>
           </a:xfrm>
           <a:prstGeom prst="rect">
@@ -2438,7 +2438,7 @@
         </p:nvSpPr>
         <p:spPr>
           <a:xfrm>
-            <a:off x="9372600" y="5334000"/>
+            <a:off x="9372600" y="6096000"/>
             <a:ext cx="4000500" cy="2476500"/>
           </a:xfrm>
           <a:prstGeom prst="roundRect">
@@ -2465,7 +2465,7 @@
         </p:nvSpPr>
         <p:spPr>
           <a:xfrm>
-            <a:off x="9677400" y="5572125"/>
+            <a:off x="9677400" y="6334125"/>
             <a:ext cx="3390900" cy="857250"/>
           </a:xfrm>
           <a:prstGeom prst="rect">
@@ -2504,7 +2504,7 @@
         </p:nvSpPr>
         <p:spPr>
           <a:xfrm>
-            <a:off x="9677400" y="6572250"/>
+            <a:off x="9677400" y="7334250"/>
             <a:ext cx="3390900" cy="1047750"/>
           </a:xfrm>
           <a:prstGeom prst="rect">
@@ -2579,7 +2579,7 @@
         </p:nvSpPr>
         <p:spPr>
           <a:xfrm>
-            <a:off x="13601700" y="5334000"/>
+            <a:off x="13601700" y="6096000"/>
             <a:ext cx="4000500" cy="2476500"/>
           </a:xfrm>
           <a:prstGeom prst="roundRect">
@@ -2606,7 +2606,7 @@
         </p:nvSpPr>
         <p:spPr>
           <a:xfrm>
-            <a:off x="13906500" y="5572125"/>
+            <a:off x="13906500" y="6334125"/>
             <a:ext cx="3390900" cy="857250"/>
           </a:xfrm>
           <a:prstGeom prst="rect">
@@ -2645,7 +2645,7 @@
         </p:nvSpPr>
         <p:spPr>
           <a:xfrm>
-            <a:off x="13906500" y="6572250"/>
+            <a:off x="13906500" y="7334250"/>
             <a:ext cx="3390900" cy="1047750"/>
           </a:xfrm>
           <a:prstGeom prst="rect">

--- a/system-design-101/vi/lessons/sd-05-005/slides/sd-05-005.pptx
+++ b/system-design-101/vi/lessons/sd-05-005/slides/sd-05-005.pptx
@@ -14488,280 +14488,115 @@
           <a:ln/>
         </p:spPr>
         <p:txBody>
-          <a:bodyPr wrap="square" lIns="0" tIns="6334" rIns="0" bIns="-6334" rtlCol="0" anchor="t"/>
+          <a:bodyPr wrap="square" lIns="0" tIns="59150" rIns="0" bIns="-59150" rtlCol="0" anchor="t"/>
           <a:lstStyle/>
           <a:p>
             <a:pPr algn="l" indent="0" marL="0">
               <a:lnSpc>
-                <a:spcPts val="3990"/>
+                <a:spcPts val="7245"/>
               </a:lnSpc>
               <a:buNone/>
             </a:pPr>
             <a:r>
-              <a:rPr lang="en-US" sz="2850" dirty="0" spc="0" kern="0">
-                <a:solidFill>
-                  <a:srgbClr val="14161C"/>
-                </a:solidFill>
-                <a:latin typeface="Be Vietnam Pro" pitchFamily="34" charset="0"/>
-                <a:ea typeface="Be Vietnam Pro" pitchFamily="34" charset="-122"/>
-                <a:cs typeface="Be Vietnam Pro" pitchFamily="34" charset="-120"/>
+              <a:rPr lang="en-US" sz="6900" dirty="0" spc="-4" kern="0">
+                <a:solidFill>
+                  <a:srgbClr val="14161C"/>
+                </a:solidFill>
+                <a:latin typeface="Bricolage Grotesque ExtraBold" pitchFamily="34" charset="0"/>
+                <a:ea typeface="Bricolage Grotesque ExtraBold" pitchFamily="34" charset="-122"/>
+                <a:cs typeface="Bricolage Grotesque ExtraBold" pitchFamily="34" charset="-120"/>
               </a:rPr>
               <a:t>Ba</a:t>
             </a:r>
             <a:r>
-              <a:rPr lang="en-US" sz="2850" dirty="0" spc="-1" kern="0">
-                <a:solidFill>
-                  <a:srgbClr val="14161C"/>
-                </a:solidFill>
-                <a:latin typeface="Be Vietnam Pro" pitchFamily="34" charset="0"/>
-                <a:ea typeface="Be Vietnam Pro" pitchFamily="34" charset="-122"/>
-                <a:cs typeface="Be Vietnam Pro" pitchFamily="34" charset="-120"/>
-              </a:rPr>
-              <a:t> tuần,</a:t>
-            </a:r>
-            <a:r>
-              <a:rPr lang="en-US" sz="2850" dirty="0" spc="21" kern="0">
-                <a:solidFill>
-                  <a:srgbClr val="14161C"/>
-                </a:solidFill>
-                <a:latin typeface="Be Vietnam Pro" pitchFamily="34" charset="0"/>
-                <a:ea typeface="Be Vietnam Pro" pitchFamily="34" charset="-122"/>
-                <a:cs typeface="Be Vietnam Pro" pitchFamily="34" charset="-120"/>
-              </a:rPr>
-              <a:t> đã</a:t>
-            </a:r>
-            <a:r>
-              <a:rPr lang="en-US" sz="2850" dirty="0" spc="1" kern="0">
-                <a:solidFill>
-                  <a:srgbClr val="14161C"/>
-                </a:solidFill>
-                <a:latin typeface="Be Vietnam Pro" pitchFamily="34" charset="0"/>
-                <a:ea typeface="Be Vietnam Pro" pitchFamily="34" charset="-122"/>
-                <a:cs typeface="Be Vietnam Pro" pitchFamily="34" charset="-120"/>
-              </a:rPr>
-              <a:t> giải</a:t>
-            </a:r>
-            <a:r>
-              <a:rPr lang="en-US" sz="2850" dirty="0" spc="0" kern="0">
-                <a:solidFill>
-                  <a:srgbClr val="14161C"/>
-                </a:solidFill>
-                <a:latin typeface="Be Vietnam Pro" pitchFamily="34" charset="0"/>
-                <a:ea typeface="Be Vietnam Pro" pitchFamily="34" charset="-122"/>
-                <a:cs typeface="Be Vietnam Pro" pitchFamily="34" charset="-120"/>
-              </a:rPr>
-              <a:t> nhiều</a:t>
-            </a:r>
-            <a:r>
-              <a:rPr lang="en-US" sz="2850" dirty="0" spc="-3" kern="0">
-                <a:solidFill>
-                  <a:srgbClr val="14161C"/>
-                </a:solidFill>
-                <a:latin typeface="Be Vietnam Pro" pitchFamily="34" charset="0"/>
-                <a:ea typeface="Be Vietnam Pro" pitchFamily="34" charset="-122"/>
-                <a:cs typeface="Be Vietnam Pro" pitchFamily="34" charset="-120"/>
-              </a:rPr>
-              <a:t> bài</a:t>
-            </a:r>
-            <a:r>
-              <a:rPr lang="en-US" sz="2850" dirty="0" spc="-11" kern="0">
-                <a:solidFill>
-                  <a:srgbClr val="14161C"/>
-                </a:solidFill>
-                <a:latin typeface="Be Vietnam Pro" pitchFamily="34" charset="0"/>
-                <a:ea typeface="Be Vietnam Pro" pitchFamily="34" charset="-122"/>
-                <a:cs typeface="Be Vietnam Pro" pitchFamily="34" charset="-120"/>
-              </a:rPr>
-              <a:t> thuật toán,</a:t>
-            </a:r>
-            <a:r>
-              <a:rPr lang="en-US" sz="2850" dirty="0" spc="-8" kern="0">
-                <a:solidFill>
-                  <a:srgbClr val="14161C"/>
-                </a:solidFill>
-                <a:latin typeface="Be Vietnam Pro" pitchFamily="34" charset="0"/>
-                <a:ea typeface="Be Vietnam Pro" pitchFamily="34" charset="-122"/>
-                <a:cs typeface="Be Vietnam Pro" pitchFamily="34" charset="-120"/>
-              </a:rPr>
-              <a:t> sắp</a:t>
-            </a:r>
-            <a:r>
-              <a:rPr lang="en-US" sz="2850" dirty="0" spc="-16" kern="0">
-                <a:solidFill>
-                  <a:srgbClr val="14161C"/>
-                </a:solidFill>
-                <a:latin typeface="Be Vietnam Pro" pitchFamily="34" charset="0"/>
-                <a:ea typeface="Be Vietnam Pro" pitchFamily="34" charset="-122"/>
-                <a:cs typeface="Be Vietnam Pro" pitchFamily="34" charset="-120"/>
-              </a:rPr>
-              <a:t> gặp</a:t>
-            </a:r>
-            <a:r>
-              <a:rPr lang="en-US" sz="2850" dirty="0" spc="-12" kern="0">
-                <a:solidFill>
-                  <a:srgbClr val="14161C"/>
-                </a:solidFill>
-                <a:latin typeface="Be Vietnam Pro" pitchFamily="34" charset="0"/>
-                <a:ea typeface="Be Vietnam Pro" pitchFamily="34" charset="-122"/>
-                <a:cs typeface="Be Vietnam Pro" pitchFamily="34" charset="-120"/>
+              <a:rPr lang="en-US" sz="6900" dirty="0" spc="2" kern="0">
+                <a:solidFill>
+                  <a:srgbClr val="14161C"/>
+                </a:solidFill>
+                <a:latin typeface="Bricolage Grotesque ExtraBold" pitchFamily="34" charset="0"/>
+                <a:ea typeface="Bricolage Grotesque ExtraBold" pitchFamily="34" charset="-122"/>
+                <a:cs typeface="Bricolage Grotesque ExtraBold" pitchFamily="34" charset="-120"/>
+              </a:rPr>
+              <a:t> tuần</a:t>
+            </a:r>
+            <a:r>
+              <a:rPr lang="en-US" sz="6900" dirty="0" spc="-64" kern="0">
+                <a:solidFill>
+                  <a:srgbClr val="14161C"/>
+                </a:solidFill>
+                <a:latin typeface="Bricolage Grotesque ExtraBold" pitchFamily="34" charset="0"/>
+                <a:ea typeface="Bricolage Grotesque ExtraBold" pitchFamily="34" charset="-122"/>
+                <a:cs typeface="Bricolage Grotesque ExtraBold" pitchFamily="34" charset="-120"/>
+              </a:rPr>
+              <a:t> tới</a:t>
+            </a:r>
+            <a:r>
+              <a:rPr lang="en-US" sz="6900" dirty="0" spc="-41" kern="0">
+                <a:solidFill>
+                  <a:srgbClr val="14161C"/>
+                </a:solidFill>
+                <a:latin typeface="Bricolage Grotesque ExtraBold" pitchFamily="34" charset="0"/>
+                <a:ea typeface="Bricolage Grotesque ExtraBold" pitchFamily="34" charset="-122"/>
+                <a:cs typeface="Bricolage Grotesque ExtraBold" pitchFamily="34" charset="-120"/>
               </a:rPr>
               <a:t> vòng</a:t>
             </a:r>
             <a:r>
-              <a:rPr lang="en-US" sz="2850" dirty="0" spc="-6" kern="0">
-                <a:solidFill>
-                  <a:srgbClr val="14161C"/>
-                </a:solidFill>
-                <a:latin typeface="Be Vietnam Pro" pitchFamily="34" charset="0"/>
-                <a:ea typeface="Be Vietnam Pro" pitchFamily="34" charset="-122"/>
-                <a:cs typeface="Be Vietnam Pro" pitchFamily="34" charset="-120"/>
+              <a:rPr lang="en-US" sz="6900" dirty="0" spc="2" kern="0">
+                <a:solidFill>
+                  <a:srgbClr val="14161C"/>
+                </a:solidFill>
+                <a:latin typeface="Bricolage Grotesque ExtraBold" pitchFamily="34" charset="0"/>
+                <a:ea typeface="Bricolage Grotesque ExtraBold" pitchFamily="34" charset="-122"/>
+                <a:cs typeface="Bricolage Grotesque ExtraBold" pitchFamily="34" charset="-120"/>
               </a:rPr>
               <a:t> thiết</a:t>
             </a:r>
             <a:r>
-              <a:rPr lang="en-US" sz="2850" dirty="0" spc="-43" kern="0">
-                <a:solidFill>
-                  <a:srgbClr val="14161C"/>
-                </a:solidFill>
-                <a:latin typeface="Be Vietnam Pro" pitchFamily="34" charset="0"/>
-                <a:ea typeface="Be Vietnam Pro" pitchFamily="34" charset="-122"/>
-                <a:cs typeface="Be Vietnam Pro" pitchFamily="34" charset="-120"/>
-              </a:rPr>
-              <a:t> kế</a:t>
-            </a:r>
-            <a:r>
-              <a:rPr lang="en-US" sz="2850" dirty="0" spc="1" kern="0">
-                <a:solidFill>
-                  <a:srgbClr val="14161C"/>
-                </a:solidFill>
-                <a:latin typeface="Be Vietnam Pro" pitchFamily="34" charset="0"/>
-                <a:ea typeface="Be Vietnam Pro" pitchFamily="34" charset="-122"/>
-                <a:cs typeface="Be Vietnam Pro" pitchFamily="34" charset="-120"/>
-              </a:rPr>
-              <a:t> hệ</a:t>
-            </a:r>
-            <a:r>
-              <a:rPr lang="en-US" sz="2850" dirty="0" spc="-2" kern="0">
-                <a:solidFill>
-                  <a:srgbClr val="14161C"/>
-                </a:solidFill>
-                <a:latin typeface="Be Vietnam Pro" pitchFamily="34" charset="0"/>
-                <a:ea typeface="Be Vietnam Pro" pitchFamily="34" charset="-122"/>
-                <a:cs typeface="Be Vietnam Pro" pitchFamily="34" charset="-120"/>
-              </a:rPr>
-              <a:t> thống.</a:t>
-            </a:r>
-            <a:r>
-              <a:rPr lang="en-US" sz="2850" dirty="0" spc="2" kern="0">
-                <a:solidFill>
-                  <a:srgbClr val="14161C"/>
-                </a:solidFill>
-                <a:latin typeface="Be Vietnam Pro" pitchFamily="34" charset="0"/>
-                <a:ea typeface="Be Vietnam Pro" pitchFamily="34" charset="-122"/>
-                <a:cs typeface="Be Vietnam Pro" pitchFamily="34" charset="-120"/>
-              </a:rPr>
-              <a:t> Ưu</a:t>
-            </a:r>
-            <a:r>
-              <a:rPr lang="en-US" sz="2850" dirty="0" spc="-1" kern="0">
-                <a:solidFill>
-                  <a:srgbClr val="14161C"/>
-                </a:solidFill>
-                <a:latin typeface="Be Vietnam Pro" pitchFamily="34" charset="0"/>
-                <a:ea typeface="Be Vietnam Pro" pitchFamily="34" charset="-122"/>
-                <a:cs typeface="Be Vietnam Pro" pitchFamily="34" charset="-120"/>
-              </a:rPr>
-              <a:t> tiên gì?</a:t>
-            </a:r>
-            <a:r>
-              <a:rPr lang="en-US" sz="2850" dirty="0" spc="4" kern="0">
-                <a:solidFill>
-                  <a:srgbClr val="14161C"/>
-                </a:solidFill>
-                <a:latin typeface="Be Vietnam Pro" pitchFamily="34" charset="0"/>
-                <a:ea typeface="Be Vietnam Pro" pitchFamily="34" charset="-122"/>
-                <a:cs typeface="Be Vietnam Pro" pitchFamily="34" charset="-120"/>
-              </a:rPr>
-              <a:t> Mua</a:t>
-            </a:r>
-            <a:r>
-              <a:rPr lang="en-US" sz="2850" dirty="0" spc="-20" kern="0">
-                <a:solidFill>
-                  <a:srgbClr val="14161C"/>
-                </a:solidFill>
-                <a:latin typeface="Be Vietnam Pro" pitchFamily="34" charset="0"/>
-                <a:ea typeface="Be Vietnam Pro" pitchFamily="34" charset="-122"/>
-                <a:cs typeface="Be Vietnam Pro" pitchFamily="34" charset="-120"/>
-              </a:rPr>
-              <a:t> ngay</a:t>
-            </a:r>
-            <a:r>
-              <a:rPr lang="en-US" sz="2850" dirty="0" spc="-3" kern="0">
-                <a:solidFill>
-                  <a:srgbClr val="14161C"/>
-                </a:solidFill>
-                <a:latin typeface="Be Vietnam Pro" pitchFamily="34" charset="0"/>
-                <a:ea typeface="Be Vietnam Pro" pitchFamily="34" charset="-122"/>
-                <a:cs typeface="Be Vietnam Pro" pitchFamily="34" charset="-120"/>
-              </a:rPr>
-              <a:t> khóa</a:t>
-            </a:r>
-            <a:r>
-              <a:rPr lang="en-US" sz="2850" dirty="0" spc="-4" kern="0">
-                <a:solidFill>
-                  <a:srgbClr val="14161C"/>
-                </a:solidFill>
-                <a:latin typeface="Be Vietnam Pro" pitchFamily="34" charset="0"/>
-                <a:ea typeface="Be Vietnam Pro" pitchFamily="34" charset="-122"/>
-                <a:cs typeface="Be Vietnam Pro" pitchFamily="34" charset="-120"/>
-              </a:rPr>
-              <a:t> học</a:t>
-            </a:r>
-            <a:r>
-              <a:rPr lang="en-US" sz="2850" dirty="0" spc="9" kern="0">
-                <a:solidFill>
-                  <a:srgbClr val="14161C"/>
-                </a:solidFill>
-                <a:latin typeface="Be Vietnam Pro" pitchFamily="34" charset="0"/>
-                <a:ea typeface="Be Vietnam Pro" pitchFamily="34" charset="-122"/>
-                <a:cs typeface="Be Vietnam Pro" pitchFamily="34" charset="-120"/>
-              </a:rPr>
-              <a:t> được</a:t>
-            </a:r>
-            <a:r>
-              <a:rPr lang="en-US" sz="2850" dirty="0" spc="3" kern="0">
-                <a:solidFill>
-                  <a:srgbClr val="14161C"/>
-                </a:solidFill>
-                <a:latin typeface="Be Vietnam Pro" pitchFamily="34" charset="0"/>
-                <a:ea typeface="Be Vietnam Pro" pitchFamily="34" charset="-122"/>
-                <a:cs typeface="Be Vietnam Pro" pitchFamily="34" charset="-120"/>
-              </a:rPr>
-              <a:t> hai</a:t>
-            </a:r>
-            <a:r>
-              <a:rPr lang="en-US" sz="2850" dirty="0" spc="2" kern="0">
-                <a:solidFill>
-                  <a:srgbClr val="14161C"/>
-                </a:solidFill>
-                <a:latin typeface="Be Vietnam Pro" pitchFamily="34" charset="0"/>
-                <a:ea typeface="Be Vietnam Pro" pitchFamily="34" charset="-122"/>
-                <a:cs typeface="Be Vietnam Pro" pitchFamily="34" charset="-120"/>
-              </a:rPr>
-              <a:t> nơi</a:t>
-            </a:r>
-            <a:r>
-              <a:rPr lang="en-US" sz="2850" dirty="0" spc="-2" kern="0">
-                <a:solidFill>
-                  <a:srgbClr val="14161C"/>
-                </a:solidFill>
-                <a:latin typeface="Be Vietnam Pro" pitchFamily="34" charset="0"/>
-                <a:ea typeface="Be Vietnam Pro" pitchFamily="34" charset="-122"/>
-                <a:cs typeface="Be Vietnam Pro" pitchFamily="34" charset="-120"/>
-              </a:rPr>
-              <a:t> nhắc?</a:t>
-            </a:r>
-            <a:endParaRPr lang="en-US" sz="2850" dirty="0"/>
+              <a:rPr lang="en-US" sz="6900" dirty="0" spc="-39" kern="0">
+                <a:solidFill>
+                  <a:srgbClr val="14161C"/>
+                </a:solidFill>
+                <a:latin typeface="Bricolage Grotesque ExtraBold" pitchFamily="34" charset="0"/>
+                <a:ea typeface="Bricolage Grotesque ExtraBold" pitchFamily="34" charset="-122"/>
+                <a:cs typeface="Bricolage Grotesque ExtraBold" pitchFamily="34" charset="-120"/>
+              </a:rPr>
+              <a:t> kế:</a:t>
+            </a:r>
+            <a:r>
+              <a:rPr lang="en-US" sz="6900" dirty="0" spc="0" kern="0">
+                <a:solidFill>
+                  <a:srgbClr val="14161C"/>
+                </a:solidFill>
+                <a:latin typeface="Bricolage Grotesque ExtraBold" pitchFamily="34" charset="0"/>
+                <a:ea typeface="Bricolage Grotesque ExtraBold" pitchFamily="34" charset="-122"/>
+                <a:cs typeface="Bricolage Grotesque ExtraBold" pitchFamily="34" charset="-120"/>
+              </a:rPr>
+              <a:t> ưu</a:t>
+            </a:r>
+            <a:r>
+              <a:rPr lang="en-US" sz="6900" dirty="0" spc="5" kern="0">
+                <a:solidFill>
+                  <a:srgbClr val="14161C"/>
+                </a:solidFill>
+                <a:latin typeface="Bricolage Grotesque ExtraBold" pitchFamily="34" charset="0"/>
+                <a:ea typeface="Bricolage Grotesque ExtraBold" pitchFamily="34" charset="-122"/>
+                <a:cs typeface="Bricolage Grotesque ExtraBold" pitchFamily="34" charset="-120"/>
+              </a:rPr>
+              <a:t> tiên</a:t>
+            </a:r>
+            <a:r>
+              <a:rPr lang="en-US" sz="6900" dirty="0" spc="-21" kern="0">
+                <a:solidFill>
+                  <a:srgbClr val="14161C"/>
+                </a:solidFill>
+                <a:latin typeface="Bricolage Grotesque ExtraBold" pitchFamily="34" charset="0"/>
+                <a:ea typeface="Bricolage Grotesque ExtraBold" pitchFamily="34" charset="-122"/>
+                <a:cs typeface="Bricolage Grotesque ExtraBold" pitchFamily="34" charset="-120"/>
+              </a:rPr>
+              <a:t> gì?</a:t>
+            </a:r>
+            <a:endParaRPr lang="en-US" sz="6900" dirty="0"/>
           </a:p>
         </p:txBody>
       </p:sp>

--- a/system-design-101/vi/lessons/sd-05-005/slides/sd-05-005.pptx
+++ b/system-design-101/vi/lessons/sd-05-005/slides/sd-05-005.pptx
@@ -1991,7 +1991,7 @@
               <a:buNone/>
             </a:pPr>
             <a:r>
-              <a:rPr lang="en-US" sz="3000" dirty="0" spc="-10" kern="0">
+              <a:rPr lang="en-US" sz="3000" dirty="0" spc="-1" kern="0">
                 <a:solidFill>
                   <a:srgbClr val="E4E1D8"/>
                 </a:solidFill>
@@ -1999,7 +1999,18 @@
                 <a:ea typeface="Be Vietnam Pro" pitchFamily="34" charset="-122"/>
                 <a:cs typeface="Be Vietnam Pro" pitchFamily="34" charset="-120"/>
               </a:rPr>
-              <a:t>Một</a:t>
+              <a:t>Ba</a:t>
+            </a:r>
+            <a:r>
+              <a:rPr lang="en-US" sz="3000" dirty="0" spc="-3" kern="0">
+                <a:solidFill>
+                  <a:srgbClr val="E4E1D8"/>
+                </a:solidFill>
+                <a:latin typeface="Be Vietnam Pro" pitchFamily="34" charset="0"/>
+                <a:ea typeface="Be Vietnam Pro" pitchFamily="34" charset="-122"/>
+                <a:cs typeface="Be Vietnam Pro" pitchFamily="34" charset="-120"/>
+              </a:rPr>
+              <a:t> tuần</a:t>
             </a:r>
             <a:r>
               <a:rPr lang="en-US" sz="3000" dirty="0" spc="0" kern="0">
@@ -2010,10 +2021,10 @@
                 <a:ea typeface="Be Vietnam Pro" pitchFamily="34" charset="-122"/>
                 <a:cs typeface="Be Vietnam Pro" pitchFamily="34" charset="-120"/>
               </a:rPr>
-              <a:t> danh</a:t>
-            </a:r>
-            <a:r>
-              <a:rPr lang="en-US" sz="3000" dirty="0" spc="-6" kern="0">
+              <a:t> ôn:</a:t>
+            </a:r>
+            <a:r>
+              <a:rPr lang="en-US" sz="3000" dirty="0" spc="-1" kern="0">
                 <a:solidFill>
                   <a:srgbClr val="E4E1D8"/>
                 </a:solidFill>
@@ -2021,10 +2032,10 @@
                 <a:ea typeface="Be Vietnam Pro" pitchFamily="34" charset="-122"/>
                 <a:cs typeface="Be Vietnam Pro" pitchFamily="34" charset="-120"/>
               </a:rPr>
-              <a:t> sách</a:t>
-            </a:r>
-            <a:r>
-              <a:rPr lang="en-US" sz="3000" dirty="0" spc="-15" kern="0">
+              <a:t> học</a:t>
+            </a:r>
+            <a:r>
+              <a:rPr lang="en-US" sz="3000" dirty="0" spc="3" kern="0">
                 <a:solidFill>
                   <a:srgbClr val="E4E1D8"/>
                 </a:solidFill>
@@ -2032,7 +2043,18 @@
                 <a:ea typeface="Be Vietnam Pro" pitchFamily="34" charset="-122"/>
                 <a:cs typeface="Be Vietnam Pro" pitchFamily="34" charset="-120"/>
               </a:rPr>
-              <a:t> tài</a:t>
+              <a:t> gì</a:t>
+            </a:r>
+            <a:r>
+              <a:rPr lang="en-US" sz="3000" dirty="0" spc="7" kern="0">
+                <a:solidFill>
+                  <a:srgbClr val="E4E1D8"/>
+                </a:solidFill>
+                <a:latin typeface="Be Vietnam Pro" pitchFamily="34" charset="0"/>
+                <a:ea typeface="Be Vietnam Pro" pitchFamily="34" charset="-122"/>
+                <a:cs typeface="Be Vietnam Pro" pitchFamily="34" charset="-120"/>
+              </a:rPr>
+              <a:t> trước,</a:t>
             </a:r>
             <a:r>
               <a:rPr lang="en-US" sz="3000" dirty="0" spc="2" kern="0">
@@ -2043,10 +2065,10 @@
                 <a:ea typeface="Be Vietnam Pro" pitchFamily="34" charset="-122"/>
                 <a:cs typeface="Be Vietnam Pro" pitchFamily="34" charset="-120"/>
               </a:rPr>
-              <a:t> liệu</a:t>
-            </a:r>
-            <a:r>
-              <a:rPr lang="en-US" sz="3000" dirty="0" spc="10" kern="0">
+              <a:t> mua</a:t>
+            </a:r>
+            <a:r>
+              <a:rPr lang="en-US" sz="3000" dirty="0" spc="3" kern="0">
                 <a:solidFill>
                   <a:srgbClr val="E4E1D8"/>
                 </a:solidFill>
@@ -2054,10 +2076,10 @@
                 <a:ea typeface="Be Vietnam Pro" pitchFamily="34" charset="-122"/>
                 <a:cs typeface="Be Vietnam Pro" pitchFamily="34" charset="-120"/>
               </a:rPr>
-              <a:t> chưa</a:t>
-            </a:r>
-            <a:r>
-              <a:rPr lang="en-US" sz="3000" dirty="0" spc="2" kern="0">
+              <a:t> gì</a:t>
+            </a:r>
+            <a:r>
+              <a:rPr lang="en-US" sz="3000" dirty="0" spc="-7" kern="0">
                 <a:solidFill>
                   <a:srgbClr val="E4E1D8"/>
                 </a:solidFill>
@@ -2065,40 +2087,7 @@
                 <a:ea typeface="Be Vietnam Pro" pitchFamily="34" charset="-122"/>
                 <a:cs typeface="Be Vietnam Pro" pitchFamily="34" charset="-120"/>
               </a:rPr>
-              <a:t> phải</a:t>
-            </a:r>
-            <a:r>
-              <a:rPr lang="en-US" sz="3000" dirty="0" spc="-43" kern="0">
-                <a:solidFill>
-                  <a:srgbClr val="E4E1D8"/>
-                </a:solidFill>
-                <a:latin typeface="Be Vietnam Pro" pitchFamily="34" charset="0"/>
-                <a:ea typeface="Be Vietnam Pro" pitchFamily="34" charset="-122"/>
-                <a:cs typeface="Be Vietnam Pro" pitchFamily="34" charset="-120"/>
-              </a:rPr>
-              <a:t> kế</a:t>
-            </a:r>
-            <a:r>
-              <a:rPr lang="en-US" sz="3000" dirty="0" spc="-2" kern="0">
-                <a:solidFill>
-                  <a:srgbClr val="E4E1D8"/>
-                </a:solidFill>
-                <a:latin typeface="Be Vietnam Pro" pitchFamily="34" charset="0"/>
-                <a:ea typeface="Be Vietnam Pro" pitchFamily="34" charset="-122"/>
-                <a:cs typeface="Be Vietnam Pro" pitchFamily="34" charset="-120"/>
-              </a:rPr>
-              <a:t> hoạch</a:t>
-            </a:r>
-            <a:r>
-              <a:rPr lang="en-US" sz="3000" dirty="0" spc="-1" kern="0">
-                <a:solidFill>
-                  <a:srgbClr val="E4E1D8"/>
-                </a:solidFill>
-                <a:latin typeface="Be Vietnam Pro" pitchFamily="34" charset="0"/>
-                <a:ea typeface="Be Vietnam Pro" pitchFamily="34" charset="-122"/>
-                <a:cs typeface="Be Vietnam Pro" pitchFamily="34" charset="-120"/>
-              </a:rPr>
-              <a:t> ôn.</a:t>
+              <a:t> sau?</a:t>
             </a:r>
             <a:endParaRPr lang="en-US" sz="3000" dirty="0"/>
           </a:p>
@@ -3234,7 +3223,7 @@
               <a:buNone/>
             </a:pPr>
             <a:r>
-              <a:rPr lang="en-US" sz="2400" dirty="0" spc="-1" kern="0">
+              <a:rPr lang="en-US" sz="2400" dirty="0" spc="-58" kern="0">
                 <a:solidFill>
                   <a:srgbClr val="E4E1D8"/>
                 </a:solidFill>
@@ -3242,7 +3231,29 @@
                 <a:ea typeface="Be Vietnam Pro" pitchFamily="34" charset="-122"/>
                 <a:cs typeface="Be Vietnam Pro" pitchFamily="34" charset="-120"/>
               </a:rPr>
-              <a:t>Tình</a:t>
+              <a:t>Kể</a:t>
+            </a:r>
+            <a:r>
+              <a:rPr lang="en-US" sz="2400" dirty="0" spc="-4" kern="0">
+                <a:solidFill>
+                  <a:srgbClr val="E4E1D8"/>
+                </a:solidFill>
+                <a:latin typeface="Be Vietnam Pro" pitchFamily="34" charset="0"/>
+                <a:ea typeface="Be Vietnam Pro" pitchFamily="34" charset="-122"/>
+                <a:cs typeface="Be Vietnam Pro" pitchFamily="34" charset="-120"/>
+              </a:rPr>
+              <a:t> việc:</a:t>
+            </a:r>
+            <a:r>
+              <a:rPr lang="en-US" sz="2400" dirty="0" spc="0" kern="0">
+                <a:solidFill>
+                  <a:srgbClr val="E4E1D8"/>
+                </a:solidFill>
+                <a:latin typeface="Be Vietnam Pro" pitchFamily="34" charset="0"/>
+                <a:ea typeface="Be Vietnam Pro" pitchFamily="34" charset="-122"/>
+                <a:cs typeface="Be Vietnam Pro" pitchFamily="34" charset="-120"/>
+              </a:rPr>
+              <a:t> tình</a:t>
             </a:r>
             <a:r>
               <a:rPr lang="en-US" sz="2400" dirty="0" spc="1" kern="0">
@@ -3278,7 +3289,7 @@
               <a:t> kết</a:t>
             </a:r>
             <a:r>
-              <a:rPr lang="en-US" sz="2400" dirty="0" spc="0" kern="0">
+              <a:rPr lang="en-US" sz="2400" dirty="0" spc="1" kern="0">
                 <a:solidFill>
                   <a:srgbClr val="E4E1D8"/>
                 </a:solidFill>
@@ -3286,73 +3297,7 @@
                 <a:ea typeface="Be Vietnam Pro" pitchFamily="34" charset="-122"/>
                 <a:cs typeface="Be Vietnam Pro" pitchFamily="34" charset="-120"/>
               </a:rPr>
-              <a:t> quả: cách</a:t>
-            </a:r>
-            <a:r>
-              <a:rPr lang="en-US" sz="2400" dirty="0" spc="-37" kern="0">
-                <a:solidFill>
-                  <a:srgbClr val="E4E1D8"/>
-                </a:solidFill>
-                <a:latin typeface="Be Vietnam Pro" pitchFamily="34" charset="0"/>
-                <a:ea typeface="Be Vietnam Pro" pitchFamily="34" charset="-122"/>
-                <a:cs typeface="Be Vietnam Pro" pitchFamily="34" charset="-120"/>
-              </a:rPr>
-              <a:t> kể</a:t>
-            </a:r>
-            <a:r>
-              <a:rPr lang="en-US" sz="2400" dirty="0" spc="-3" kern="0">
-                <a:solidFill>
-                  <a:srgbClr val="E4E1D8"/>
-                </a:solidFill>
-                <a:latin typeface="Be Vietnam Pro" pitchFamily="34" charset="0"/>
-                <a:ea typeface="Be Vietnam Pro" pitchFamily="34" charset="-122"/>
-                <a:cs typeface="Be Vietnam Pro" pitchFamily="34" charset="-120"/>
-              </a:rPr>
-              <a:t> một</a:t>
-            </a:r>
-            <a:r>
-              <a:rPr lang="en-US" sz="2400" dirty="0" spc="0" kern="0">
-                <a:solidFill>
-                  <a:srgbClr val="E4E1D8"/>
-                </a:solidFill>
-                <a:latin typeface="Be Vietnam Pro" pitchFamily="34" charset="0"/>
-                <a:ea typeface="Be Vietnam Pro" pitchFamily="34" charset="-122"/>
-                <a:cs typeface="Be Vietnam Pro" pitchFamily="34" charset="-120"/>
-              </a:rPr>
-              <a:t> câu</a:t>
-            </a:r>
-            <a:r>
-              <a:rPr lang="en-US" sz="2400" dirty="0" spc="-13" kern="0">
-                <a:solidFill>
-                  <a:srgbClr val="E4E1D8"/>
-                </a:solidFill>
-                <a:latin typeface="Be Vietnam Pro" pitchFamily="34" charset="0"/>
-                <a:ea typeface="Be Vietnam Pro" pitchFamily="34" charset="-122"/>
-                <a:cs typeface="Be Vietnam Pro" pitchFamily="34" charset="-120"/>
-              </a:rPr>
-              <a:t> chuyện</a:t>
-            </a:r>
-            <a:r>
-              <a:rPr lang="en-US" sz="2400" dirty="0" spc="1" kern="0">
-                <a:solidFill>
-                  <a:srgbClr val="E4E1D8"/>
-                </a:solidFill>
-                <a:latin typeface="Be Vietnam Pro" pitchFamily="34" charset="0"/>
-                <a:ea typeface="Be Vietnam Pro" pitchFamily="34" charset="-122"/>
-                <a:cs typeface="Be Vietnam Pro" pitchFamily="34" charset="-120"/>
-              </a:rPr>
-              <a:t> công</a:t>
-            </a:r>
-            <a:r>
-              <a:rPr lang="en-US" sz="2400" dirty="0" spc="-4" kern="0">
-                <a:solidFill>
-                  <a:srgbClr val="E4E1D8"/>
-                </a:solidFill>
-                <a:latin typeface="Be Vietnam Pro" pitchFamily="34" charset="0"/>
-                <a:ea typeface="Be Vietnam Pro" pitchFamily="34" charset="-122"/>
-                <a:cs typeface="Be Vietnam Pro" pitchFamily="34" charset="-120"/>
-              </a:rPr>
-              <a:t> việc.</a:t>
+              <a:t> quả.</a:t>
             </a:r>
             <a:endParaRPr lang="en-US" sz="2400" dirty="0"/>
           </a:p>
@@ -3560,7 +3505,7 @@
                 <a:ea typeface="Be Vietnam Pro" pitchFamily="34" charset="-122"/>
                 <a:cs typeface="Be Vietnam Pro" pitchFamily="34" charset="-120"/>
               </a:rPr>
-              <a:t> câu hỏi</a:t>
+              <a:t> câu</a:t>
             </a:r>
             <a:r>
               <a:rPr lang="en-US" sz="2400" dirty="0" spc="2" kern="0">
@@ -3999,7 +3944,18 @@
                 <a:ea typeface="Be Vietnam Pro" pitchFamily="34" charset="-122"/>
                 <a:cs typeface="Be Vietnam Pro" pitchFamily="34" charset="-120"/>
               </a:rPr>
-              <a:t> 2026-10-16. Hình</a:t>
+              <a:t> 2026-10-16;</a:t>
+            </a:r>
+            <a:r>
+              <a:rPr lang="en-US" sz="1800" dirty="0" spc="-2" kern="0">
+                <a:solidFill>
+                  <a:srgbClr val="9AA0B5"/>
+                </a:solidFill>
+                <a:latin typeface="Be Vietnam Pro" pitchFamily="34" charset="0"/>
+                <a:ea typeface="Be Vietnam Pro" pitchFamily="34" charset="-122"/>
+                <a:cs typeface="Be Vietnam Pro" pitchFamily="34" charset="-120"/>
+              </a:rPr>
+              <a:t> hình</a:t>
             </a:r>
             <a:r>
               <a:rPr lang="en-US" sz="1800" dirty="0" spc="-5" kern="0">
@@ -4013,7 +3969,7 @@
               <a:t> thiết</a:t>
             </a:r>
             <a:r>
-              <a:rPr lang="en-US" sz="1800" dirty="0" spc="-29" kern="0">
+              <a:rPr lang="en-US" sz="1800" dirty="0" spc="-28" kern="0">
                 <a:solidFill>
                   <a:srgbClr val="9AA0B5"/>
                 </a:solidFill>
@@ -4024,7 +3980,7 @@
               <a:t> kế</a:t>
             </a:r>
             <a:r>
-              <a:rPr lang="en-US" sz="1800" dirty="0" spc="9" kern="0">
+              <a:rPr lang="en-US" sz="1800" dirty="0" spc="8" kern="0">
                 <a:solidFill>
                   <a:srgbClr val="9AA0B5"/>
                 </a:solidFill>
@@ -4035,7 +3991,7 @@
               <a:t> độc</a:t>
             </a:r>
             <a:r>
-              <a:rPr lang="en-US" sz="1800" dirty="0" spc="-2" kern="0">
+              <a:rPr lang="en-US" sz="1800" dirty="0" spc="0" kern="0">
                 <a:solidFill>
                   <a:srgbClr val="9AA0B5"/>
                 </a:solidFill>
@@ -4043,29 +3999,7 @@
                 <a:ea typeface="Be Vietnam Pro" pitchFamily="34" charset="-122"/>
                 <a:cs typeface="Be Vietnam Pro" pitchFamily="34" charset="-120"/>
               </a:rPr>
-              <a:t> lập, không dùng</a:t>
-            </a:r>
-            <a:r>
-              <a:rPr lang="en-US" sz="1800" dirty="0" spc="-1" kern="0">
-                <a:solidFill>
-                  <a:srgbClr val="9AA0B5"/>
-                </a:solidFill>
-                <a:latin typeface="Be Vietnam Pro" pitchFamily="34" charset="0"/>
-                <a:ea typeface="Be Vietnam Pro" pitchFamily="34" charset="-122"/>
-                <a:cs typeface="Be Vietnam Pro" pitchFamily="34" charset="-120"/>
-              </a:rPr>
-              <a:t> ảnh</a:t>
-            </a:r>
-            <a:r>
-              <a:rPr lang="en-US" sz="1800" dirty="0" spc="-3" kern="0">
-                <a:solidFill>
-                  <a:srgbClr val="9AA0B5"/>
-                </a:solidFill>
-                <a:latin typeface="Be Vietnam Pro" pitchFamily="34" charset="0"/>
-                <a:ea typeface="Be Vietnam Pro" pitchFamily="34" charset="-122"/>
-                <a:cs typeface="Be Vietnam Pro" pitchFamily="34" charset="-120"/>
-              </a:rPr>
-              <a:t> nguồn.</a:t>
+              <a:t> lập.</a:t>
             </a:r>
             <a:endParaRPr lang="en-US" sz="1800" dirty="0"/>
           </a:p>
@@ -4843,10 +4777,10 @@
                 <a:ea typeface="Be Vietnam Pro" pitchFamily="34" charset="-122"/>
                 <a:cs typeface="Be Vietnam Pro" pitchFamily="34" charset="-120"/>
               </a:rPr>
-              <a:t> nguồn</a:t>
-            </a:r>
-            <a:r>
-              <a:rPr lang="en-US" sz="2700" dirty="0" spc="-24" kern="0">
+              <a:t> nguồn:</a:t>
+            </a:r>
+            <a:r>
+              <a:rPr lang="en-US" sz="2700" dirty="0" spc="-8" kern="0">
                 <a:solidFill>
                   <a:srgbClr val="14161C"/>
                 </a:solidFill>
@@ -4854,10 +4788,10 @@
                 <a:ea typeface="Be Vietnam Pro" pitchFamily="34" charset="-122"/>
                 <a:cs typeface="Be Vietnam Pro" pitchFamily="34" charset="-120"/>
               </a:rPr>
-              <a:t> xếp</a:t>
-            </a:r>
-            <a:r>
-              <a:rPr lang="en-US" sz="2700" dirty="0" spc="-13" kern="0">
+              <a:t> sáu</a:t>
+            </a:r>
+            <a:r>
+              <a:rPr lang="en-US" sz="2700" dirty="0" spc="0" kern="0">
                 <a:solidFill>
                   <a:srgbClr val="14161C"/>
                 </a:solidFill>
@@ -4865,54 +4799,10 @@
                 <a:ea typeface="Be Vietnam Pro" pitchFamily="34" charset="-122"/>
                 <a:cs typeface="Be Vietnam Pro" pitchFamily="34" charset="-120"/>
               </a:rPr>
-              <a:t> tài</a:t>
-            </a:r>
-            <a:r>
-              <a:rPr lang="en-US" sz="2700" dirty="0" spc="-1" kern="0">
-                <a:solidFill>
-                  <a:srgbClr val="14161C"/>
-                </a:solidFill>
-                <a:latin typeface="Be Vietnam Pro" pitchFamily="34" charset="0"/>
-                <a:ea typeface="Be Vietnam Pro" pitchFamily="34" charset="-122"/>
-                <a:cs typeface="Be Vietnam Pro" pitchFamily="34" charset="-120"/>
-              </a:rPr>
-              <a:t> liệu</a:t>
-            </a:r>
-            <a:r>
-              <a:rPr lang="en-US" sz="2700" dirty="0" spc="-2" kern="0">
-                <a:solidFill>
-                  <a:srgbClr val="14161C"/>
-                </a:solidFill>
-                <a:latin typeface="Be Vietnam Pro" pitchFamily="34" charset="0"/>
-                <a:ea typeface="Be Vietnam Pro" pitchFamily="34" charset="-122"/>
-                <a:cs typeface="Be Vietnam Pro" pitchFamily="34" charset="-120"/>
-              </a:rPr>
-              <a:t> theo</a:t>
-            </a:r>
-            <a:r>
-              <a:rPr lang="en-US" sz="2700" dirty="0" spc="-8" kern="0">
-                <a:solidFill>
-                  <a:srgbClr val="14161C"/>
-                </a:solidFill>
-                <a:latin typeface="Be Vietnam Pro" pitchFamily="34" charset="0"/>
-                <a:ea typeface="Be Vietnam Pro" pitchFamily="34" charset="-122"/>
-                <a:cs typeface="Be Vietnam Pro" pitchFamily="34" charset="-120"/>
-              </a:rPr>
-              <a:t> sáu</a:t>
-            </a:r>
-            <a:r>
-              <a:rPr lang="en-US" sz="2700" dirty="0" spc="-1" kern="0">
-                <a:solidFill>
-                  <a:srgbClr val="14161C"/>
-                </a:solidFill>
-                <a:latin typeface="Be Vietnam Pro" pitchFamily="34" charset="0"/>
-                <a:ea typeface="Be Vietnam Pro" pitchFamily="34" charset="-122"/>
-                <a:cs typeface="Be Vietnam Pro" pitchFamily="34" charset="-120"/>
-              </a:rPr>
               <a:t> mảng,</a:t>
             </a:r>
             <a:r>
-              <a:rPr lang="en-US" sz="2700" dirty="0" spc="-7" kern="0">
+              <a:rPr lang="en-US" sz="2700" dirty="0" spc="-9" kern="0">
                 <a:solidFill>
                   <a:srgbClr val="14161C"/>
                 </a:solidFill>
@@ -6606,7 +6496,7 @@
                 <a:ea typeface="Be Vietnam Pro" pitchFamily="34" charset="-122"/>
                 <a:cs typeface="Be Vietnam Pro" pitchFamily="34" charset="-120"/>
               </a:rPr>
-              <a:t> nào thì</a:t>
+              <a:t> nào,</a:t>
             </a:r>
             <a:r>
               <a:rPr lang="en-US" sz="2250" b="1" dirty="0" spc="39" kern="0">
@@ -6620,7 +6510,7 @@
               <a:t> ưu</a:t>
             </a:r>
             <a:r>
-              <a:rPr lang="en-US" sz="2250" b="1" dirty="0" spc="-1" kern="0">
+              <a:rPr lang="en-US" sz="2250" b="1" dirty="0" spc="-2" kern="0">
                 <a:solidFill>
                   <a:srgbClr val="14161C"/>
                 </a:solidFill>
@@ -6631,7 +6521,7 @@
               <a:t> tiên</a:t>
             </a:r>
             <a:r>
-              <a:rPr lang="en-US" sz="2250" b="1" dirty="0" spc="-18" kern="0">
+              <a:rPr lang="en-US" sz="2250" b="1" dirty="0" spc="-17" kern="0">
                 <a:solidFill>
                   <a:srgbClr val="14161C"/>
                 </a:solidFill>
@@ -6642,7 +6532,7 @@
               <a:t> vòng</a:t>
             </a:r>
             <a:r>
-              <a:rPr lang="en-US" sz="2250" b="1" dirty="0" spc="9" kern="0">
+              <a:rPr lang="en-US" sz="2250" b="1" dirty="0" spc="11" kern="0">
                 <a:solidFill>
                   <a:srgbClr val="14161C"/>
                 </a:solidFill>
@@ -6650,51 +6540,7 @@
                 <a:ea typeface="Be Vietnam Pro" pitchFamily="34" charset="-122"/>
                 <a:cs typeface="Be Vietnam Pro" pitchFamily="34" charset="-120"/>
               </a:rPr>
-              <a:t> đó;</a:t>
-            </a:r>
-            <a:r>
-              <a:rPr lang="en-US" sz="2250" b="1" dirty="0" spc="-3" kern="0">
-                <a:solidFill>
-                  <a:srgbClr val="14161C"/>
-                </a:solidFill>
-                <a:latin typeface="Be Vietnam Pro" pitchFamily="34" charset="0"/>
-                <a:ea typeface="Be Vietnam Pro" pitchFamily="34" charset="-122"/>
-                <a:cs typeface="Be Vietnam Pro" pitchFamily="34" charset="-120"/>
-              </a:rPr>
-              <a:t> mảng</a:t>
-            </a:r>
-            <a:r>
-              <a:rPr lang="en-US" sz="2250" b="1" dirty="0" spc="3" kern="0">
-                <a:solidFill>
-                  <a:srgbClr val="14161C"/>
-                </a:solidFill>
-                <a:latin typeface="Be Vietnam Pro" pitchFamily="34" charset="0"/>
-                <a:ea typeface="Be Vietnam Pro" pitchFamily="34" charset="-122"/>
-                <a:cs typeface="Be Vietnam Pro" pitchFamily="34" charset="-120"/>
-              </a:rPr>
-              <a:t> khác</a:t>
-            </a:r>
-            <a:r>
-              <a:rPr lang="en-US" sz="2250" b="1" dirty="0" spc="9" kern="0">
-                <a:solidFill>
-                  <a:srgbClr val="14161C"/>
-                </a:solidFill>
-                <a:latin typeface="Be Vietnam Pro" pitchFamily="34" charset="0"/>
-                <a:ea typeface="Be Vietnam Pro" pitchFamily="34" charset="-122"/>
-                <a:cs typeface="Be Vietnam Pro" pitchFamily="34" charset="-120"/>
-              </a:rPr>
-              <a:t> để</a:t>
-            </a:r>
-            <a:r>
-              <a:rPr lang="en-US" sz="2250" b="1" dirty="0" spc="2" kern="0">
-                <a:solidFill>
-                  <a:srgbClr val="14161C"/>
-                </a:solidFill>
-                <a:latin typeface="Be Vietnam Pro" pitchFamily="34" charset="0"/>
-                <a:ea typeface="Be Vietnam Pro" pitchFamily="34" charset="-122"/>
-                <a:cs typeface="Be Vietnam Pro" pitchFamily="34" charset="-120"/>
-              </a:rPr>
-              <a:t> sau</a:t>
+              <a:t> đó</a:t>
             </a:r>
             <a:endParaRPr lang="en-US" sz="2250" dirty="0"/>
           </a:p>
@@ -10598,7 +10444,51 @@
                 <a:ea typeface="Be Vietnam Pro" pitchFamily="34" charset="-122"/>
                 <a:cs typeface="Be Vietnam Pro" pitchFamily="34" charset="-120"/>
               </a:rPr>
-              <a:t>Bài</a:t>
+              <a:t>Không</a:t>
+            </a:r>
+            <a:r>
+              <a:rPr lang="en-US" sz="1950" dirty="0" spc="-28" kern="0">
+                <a:solidFill>
+                  <a:srgbClr val="9AA0B5"/>
+                </a:solidFill>
+                <a:latin typeface="Be Vietnam Pro" pitchFamily="34" charset="0"/>
+                <a:ea typeface="Be Vietnam Pro" pitchFamily="34" charset="-122"/>
+                <a:cs typeface="Be Vietnam Pro" pitchFamily="34" charset="-120"/>
+              </a:rPr>
+              <a:t> rõ</a:t>
+            </a:r>
+            <a:r>
+              <a:rPr lang="en-US" sz="1950" dirty="0" spc="-3" kern="0">
+                <a:solidFill>
+                  <a:srgbClr val="9AA0B5"/>
+                </a:solidFill>
+                <a:latin typeface="Be Vietnam Pro" pitchFamily="34" charset="0"/>
+                <a:ea typeface="Be Vietnam Pro" pitchFamily="34" charset="-122"/>
+                <a:cs typeface="Be Vietnam Pro" pitchFamily="34" charset="-120"/>
+              </a:rPr>
+              <a:t> có</a:t>
+            </a:r>
+            <a:r>
+              <a:rPr lang="en-US" sz="1950" dirty="0" spc="-2" kern="0">
+                <a:solidFill>
+                  <a:srgbClr val="9AA0B5"/>
+                </a:solidFill>
+                <a:latin typeface="Be Vietnam Pro" pitchFamily="34" charset="0"/>
+                <a:ea typeface="Be Vietnam Pro" pitchFamily="34" charset="-122"/>
+                <a:cs typeface="Be Vietnam Pro" pitchFamily="34" charset="-120"/>
+              </a:rPr>
+              <a:t> khoản</a:t>
+            </a:r>
+            <a:r>
+              <a:rPr lang="en-US" sz="1950" dirty="0" spc="1" kern="0">
+                <a:solidFill>
+                  <a:srgbClr val="9AA0B5"/>
+                </a:solidFill>
+                <a:latin typeface="Be Vietnam Pro" pitchFamily="34" charset="0"/>
+                <a:ea typeface="Be Vietnam Pro" pitchFamily="34" charset="-122"/>
+                <a:cs typeface="Be Vietnam Pro" pitchFamily="34" charset="-120"/>
+              </a:rPr>
+              <a:t> tiền</a:t>
             </a:r>
             <a:r>
               <a:rPr lang="en-US" sz="1950" dirty="0" spc="0" kern="0">
@@ -10609,10 +10499,10 @@
                 <a:ea typeface="Be Vietnam Pro" pitchFamily="34" charset="-122"/>
                 <a:cs typeface="Be Vietnam Pro" pitchFamily="34" charset="-120"/>
               </a:rPr>
-              <a:t> không</a:t>
-            </a:r>
-            <a:r>
-              <a:rPr lang="en-US" sz="1950" dirty="0" spc="-6" kern="0">
+              <a:t> nào</a:t>
+            </a:r>
+            <a:r>
+              <a:rPr lang="en-US" sz="1950" dirty="0" spc="5" kern="0">
                 <a:solidFill>
                   <a:srgbClr val="9AA0B5"/>
                 </a:solidFill>
@@ -10620,10 +10510,10 @@
                 <a:ea typeface="Be Vietnam Pro" pitchFamily="34" charset="-122"/>
                 <a:cs typeface="Be Vietnam Pro" pitchFamily="34" charset="-120"/>
               </a:rPr>
-              <a:t> biết</a:t>
-            </a:r>
-            <a:r>
-              <a:rPr lang="en-US" sz="1950" dirty="0" spc="-3" kern="0">
+              <a:t> được</a:t>
+            </a:r>
+            <a:r>
+              <a:rPr lang="en-US" sz="1950" dirty="0" spc="-18" kern="0">
                 <a:solidFill>
                   <a:srgbClr val="9AA0B5"/>
                 </a:solidFill>
@@ -10631,150 +10521,7 @@
                 <a:ea typeface="Be Vietnam Pro" pitchFamily="34" charset="-122"/>
                 <a:cs typeface="Be Vietnam Pro" pitchFamily="34" charset="-120"/>
               </a:rPr>
-              <a:t> có</a:t>
-            </a:r>
-            <a:r>
-              <a:rPr lang="en-US" sz="1950" dirty="0" spc="-2" kern="0">
-                <a:solidFill>
-                  <a:srgbClr val="9AA0B5"/>
-                </a:solidFill>
-                <a:latin typeface="Be Vietnam Pro" pitchFamily="34" charset="0"/>
-                <a:ea typeface="Be Vietnam Pro" pitchFamily="34" charset="-122"/>
-                <a:cs typeface="Be Vietnam Pro" pitchFamily="34" charset="-120"/>
-              </a:rPr>
-              <a:t> khoản</a:t>
-            </a:r>
-            <a:r>
-              <a:rPr lang="en-US" sz="1950" dirty="0" spc="1" kern="0">
-                <a:solidFill>
-                  <a:srgbClr val="9AA0B5"/>
-                </a:solidFill>
-                <a:latin typeface="Be Vietnam Pro" pitchFamily="34" charset="0"/>
-                <a:ea typeface="Be Vietnam Pro" pitchFamily="34" charset="-122"/>
-                <a:cs typeface="Be Vietnam Pro" pitchFamily="34" charset="-120"/>
-              </a:rPr>
-              <a:t> tiền nào</a:t>
-            </a:r>
-            <a:r>
-              <a:rPr lang="en-US" sz="1950" dirty="0" spc="4" kern="0">
-                <a:solidFill>
-                  <a:srgbClr val="9AA0B5"/>
-                </a:solidFill>
-                <a:latin typeface="Be Vietnam Pro" pitchFamily="34" charset="0"/>
-                <a:ea typeface="Be Vietnam Pro" pitchFamily="34" charset="-122"/>
-                <a:cs typeface="Be Vietnam Pro" pitchFamily="34" charset="-120"/>
-              </a:rPr>
-              <a:t> được</a:t>
-            </a:r>
-            <a:r>
-              <a:rPr lang="en-US" sz="1950" dirty="0" spc="-16" kern="0">
-                <a:solidFill>
-                  <a:srgbClr val="9AA0B5"/>
-                </a:solidFill>
-                <a:latin typeface="Be Vietnam Pro" pitchFamily="34" charset="0"/>
-                <a:ea typeface="Be Vietnam Pro" pitchFamily="34" charset="-122"/>
-                <a:cs typeface="Be Vietnam Pro" pitchFamily="34" charset="-120"/>
-              </a:rPr>
-              <a:t> trả,</a:t>
-            </a:r>
-            <a:r>
-              <a:rPr lang="en-US" sz="1950" dirty="0" spc="-14" kern="0">
-                <a:solidFill>
-                  <a:srgbClr val="9AA0B5"/>
-                </a:solidFill>
-                <a:latin typeface="Be Vietnam Pro" pitchFamily="34" charset="0"/>
-                <a:ea typeface="Be Vietnam Pro" pitchFamily="34" charset="-122"/>
-                <a:cs typeface="Be Vietnam Pro" pitchFamily="34" charset="-120"/>
-              </a:rPr>
-              <a:t> và</a:t>
-            </a:r>
-            <a:r>
-              <a:rPr lang="en-US" sz="1950" dirty="0" spc="-1" kern="0">
-                <a:solidFill>
-                  <a:srgbClr val="9AA0B5"/>
-                </a:solidFill>
-                <a:latin typeface="Be Vietnam Pro" pitchFamily="34" charset="0"/>
-                <a:ea typeface="Be Vietnam Pro" pitchFamily="34" charset="-122"/>
-                <a:cs typeface="Be Vietnam Pro" pitchFamily="34" charset="-120"/>
-              </a:rPr>
-              <a:t> không</a:t>
-            </a:r>
-            <a:r>
-              <a:rPr lang="en-US" sz="1950" dirty="0" spc="-29" kern="0">
-                <a:solidFill>
-                  <a:srgbClr val="9AA0B5"/>
-                </a:solidFill>
-                <a:latin typeface="Be Vietnam Pro" pitchFamily="34" charset="0"/>
-                <a:ea typeface="Be Vietnam Pro" pitchFamily="34" charset="-122"/>
-                <a:cs typeface="Be Vietnam Pro" pitchFamily="34" charset="-120"/>
-              </a:rPr>
-              <a:t> kết</a:t>
-            </a:r>
-            <a:r>
-              <a:rPr lang="en-US" sz="1950" dirty="0" spc="1" kern="0">
-                <a:solidFill>
-                  <a:srgbClr val="9AA0B5"/>
-                </a:solidFill>
-                <a:latin typeface="Be Vietnam Pro" pitchFamily="34" charset="0"/>
-                <a:ea typeface="Be Vietnam Pro" pitchFamily="34" charset="-122"/>
-                <a:cs typeface="Be Vietnam Pro" pitchFamily="34" charset="-120"/>
-              </a:rPr>
-              <a:t> luận</a:t>
-            </a:r>
-            <a:r>
-              <a:rPr lang="en-US" sz="1950" dirty="0" spc="-14" kern="0">
-                <a:solidFill>
-                  <a:srgbClr val="9AA0B5"/>
-                </a:solidFill>
-                <a:latin typeface="Be Vietnam Pro" pitchFamily="34" charset="0"/>
-                <a:ea typeface="Be Vietnam Pro" pitchFamily="34" charset="-122"/>
-                <a:cs typeface="Be Vietnam Pro" pitchFamily="34" charset="-120"/>
-              </a:rPr>
-              <a:t> về</a:t>
-            </a:r>
-            <a:r>
-              <a:rPr lang="en-US" sz="1950" dirty="0" spc="-10" kern="0">
-                <a:solidFill>
-                  <a:srgbClr val="9AA0B5"/>
-                </a:solidFill>
-                <a:latin typeface="Be Vietnam Pro" pitchFamily="34" charset="0"/>
-                <a:ea typeface="Be Vietnam Pro" pitchFamily="34" charset="-122"/>
-                <a:cs typeface="Be Vietnam Pro" pitchFamily="34" charset="-120"/>
-              </a:rPr>
-              <a:t> chất</a:t>
-            </a:r>
-            <a:r>
-              <a:rPr lang="en-US" sz="1950" dirty="0" spc="5" kern="0">
-                <a:solidFill>
-                  <a:srgbClr val="9AA0B5"/>
-                </a:solidFill>
-                <a:latin typeface="Be Vietnam Pro" pitchFamily="34" charset="0"/>
-                <a:ea typeface="Be Vietnam Pro" pitchFamily="34" charset="-122"/>
-                <a:cs typeface="Be Vietnam Pro" pitchFamily="34" charset="-120"/>
-              </a:rPr>
-              <a:t> lượng</a:t>
-            </a:r>
-            <a:r>
-              <a:rPr lang="en-US" sz="1950" dirty="0" spc="-4" kern="0">
-                <a:solidFill>
-                  <a:srgbClr val="9AA0B5"/>
-                </a:solidFill>
-                <a:latin typeface="Be Vietnam Pro" pitchFamily="34" charset="0"/>
-                <a:ea typeface="Be Vietnam Pro" pitchFamily="34" charset="-122"/>
-                <a:cs typeface="Be Vietnam Pro" pitchFamily="34" charset="-120"/>
-              </a:rPr>
-              <a:t> khóa</a:t>
-            </a:r>
-            <a:r>
-              <a:rPr lang="en-US" sz="1950" dirty="0" spc="-5" kern="0">
-                <a:solidFill>
-                  <a:srgbClr val="9AA0B5"/>
-                </a:solidFill>
-                <a:latin typeface="Be Vietnam Pro" pitchFamily="34" charset="0"/>
-                <a:ea typeface="Be Vietnam Pro" pitchFamily="34" charset="-122"/>
-                <a:cs typeface="Be Vietnam Pro" pitchFamily="34" charset="-120"/>
-              </a:rPr>
-              <a:t> học.</a:t>
+              <a:t> trả.</a:t>
             </a:r>
             <a:endParaRPr lang="en-US" sz="1950" dirty="0"/>
           </a:p>
@@ -10863,7 +10610,7 @@
               <a:t> nhắc</a:t>
             </a:r>
             <a:r>
-              <a:rPr lang="en-US" sz="3600" dirty="0" spc="1" kern="0">
+              <a:rPr lang="en-US" sz="3600" dirty="0" spc="-21" kern="0">
                 <a:solidFill>
                   <a:srgbClr val="14161C"/>
                 </a:solidFill>
@@ -10871,7 +10618,7 @@
                 <a:ea typeface="Bricolage Grotesque ExtraBold" pitchFamily="34" charset="-122"/>
                 <a:cs typeface="Bricolage Grotesque ExtraBold" pitchFamily="34" charset="-120"/>
               </a:rPr>
-              <a:t> không</a:t>
+              <a:t> chưa</a:t>
             </a:r>
             <a:r>
               <a:rPr lang="en-US" sz="3600" dirty="0" spc="6" kern="0">
@@ -10896,7 +10643,7 @@
               <a:t> hai</a:t>
             </a:r>
             <a:r>
-              <a:rPr lang="en-US" sz="3600" dirty="0" spc="3" kern="0">
+              <a:rPr lang="en-US" sz="3600" dirty="0" spc="2" kern="0">
                 <a:solidFill>
                   <a:srgbClr val="14161C"/>
                 </a:solidFill>
@@ -10904,10 +10651,10 @@
                 <a:ea typeface="Bricolage Grotesque ExtraBold" pitchFamily="34" charset="-122"/>
                 <a:cs typeface="Bricolage Grotesque ExtraBold" pitchFamily="34" charset="-120"/>
               </a:rPr>
-              <a:t> lần</a:t>
-            </a:r>
-            <a:r>
-              <a:rPr lang="en-US" sz="3600" dirty="0" spc="2" kern="0">
+              <a:t> kiểm</a:t>
+            </a:r>
+            <a:r>
+              <a:rPr lang="en-US" sz="3600" dirty="0" spc="5" kern="0">
                 <a:solidFill>
                   <a:srgbClr val="14161C"/>
                 </a:solidFill>
@@ -10915,10 +10662,10 @@
                 <a:ea typeface="Bricolage Grotesque ExtraBold" pitchFamily="34" charset="-122"/>
                 <a:cs typeface="Bricolage Grotesque ExtraBold" pitchFamily="34" charset="-120"/>
               </a:rPr>
-              <a:t> kiểm</a:t>
-            </a:r>
-            <a:r>
-              <a:rPr lang="en-US" sz="3600" dirty="0" spc="5" kern="0">
+              <a:t> chứng</a:t>
+            </a:r>
+            <a:r>
+              <a:rPr lang="en-US" sz="3600" dirty="0" spc="8" kern="0">
                 <a:solidFill>
                   <a:srgbClr val="14161C"/>
                 </a:solidFill>
@@ -10926,21 +10673,10 @@
                 <a:ea typeface="Bricolage Grotesque ExtraBold" pitchFamily="34" charset="-122"/>
                 <a:cs typeface="Bricolage Grotesque ExtraBold" pitchFamily="34" charset="-120"/>
               </a:rPr>
-              <a:t> chứng</a:t>
-            </a:r>
-            <a:r>
-              <a:rPr lang="en-US" sz="3600" dirty="0" spc="9" kern="0">
-                <a:solidFill>
-                  <a:srgbClr val="14161C"/>
-                </a:solidFill>
-                <a:latin typeface="Bricolage Grotesque ExtraBold" pitchFamily="34" charset="0"/>
-                <a:ea typeface="Bricolage Grotesque ExtraBold" pitchFamily="34" charset="-122"/>
-                <a:cs typeface="Bricolage Grotesque ExtraBold" pitchFamily="34" charset="-120"/>
-              </a:rPr>
               <a:t> độc</a:t>
             </a:r>
             <a:r>
-              <a:rPr lang="en-US" sz="3600" dirty="0" spc="-3" kern="0">
+              <a:rPr lang="en-US" sz="3600" dirty="0" spc="-2" kern="0">
                 <a:solidFill>
                   <a:srgbClr val="14161C"/>
                 </a:solidFill>
@@ -12314,10 +12050,10 @@
                 <a:ea typeface="Be Vietnam Pro" pitchFamily="34" charset="-122"/>
                 <a:cs typeface="Be Vietnam Pro" pitchFamily="34" charset="-120"/>
               </a:rPr>
-              <a:t> dung</a:t>
-            </a:r>
-            <a:r>
-              <a:rPr lang="en-US" sz="2400" dirty="0" spc="-15" kern="0">
+              <a:t> dung,</a:t>
+            </a:r>
+            <a:r>
+              <a:rPr lang="en-US" sz="2400" dirty="0" spc="-10" kern="0">
                 <a:solidFill>
                   <a:srgbClr val="6B6A66"/>
                 </a:solidFill>
@@ -12325,87 +12061,32 @@
                 <a:ea typeface="Be Vietnam Pro" pitchFamily="34" charset="-122"/>
                 <a:cs typeface="Be Vietnam Pro" pitchFamily="34" charset="-120"/>
               </a:rPr>
-              <a:t> và</a:t>
+              <a:t> tài</a:t>
+            </a:r>
+            <a:r>
+              <a:rPr lang="en-US" sz="2400" dirty="0" spc="-2" kern="0">
+                <a:solidFill>
+                  <a:srgbClr val="6B6A66"/>
+                </a:solidFill>
+                <a:latin typeface="Be Vietnam Pro" pitchFamily="34" charset="0"/>
+                <a:ea typeface="Be Vietnam Pro" pitchFamily="34" charset="-122"/>
+                <a:cs typeface="Be Vietnam Pro" pitchFamily="34" charset="-120"/>
+              </a:rPr>
+              <a:t> liệu</a:t>
+            </a:r>
+            <a:r>
+              <a:rPr lang="en-US" sz="2400" dirty="0" spc="12" kern="0">
+                <a:solidFill>
+                  <a:srgbClr val="6B6A66"/>
+                </a:solidFill>
+                <a:latin typeface="Be Vietnam Pro" pitchFamily="34" charset="0"/>
+                <a:ea typeface="Be Vietnam Pro" pitchFamily="34" charset="-122"/>
+                <a:cs typeface="Be Vietnam Pro" pitchFamily="34" charset="-120"/>
+              </a:rPr>
+              <a:t> đều đổi</a:t>
             </a:r>
             <a:r>
               <a:rPr lang="en-US" sz="2400" dirty="0" spc="1" kern="0">
-                <a:solidFill>
-                  <a:srgbClr val="6B6A66"/>
-                </a:solidFill>
-                <a:latin typeface="Be Vietnam Pro" pitchFamily="34" charset="0"/>
-                <a:ea typeface="Be Vietnam Pro" pitchFamily="34" charset="-122"/>
-                <a:cs typeface="Be Vietnam Pro" pitchFamily="34" charset="-120"/>
-              </a:rPr>
-              <a:t> sự</a:t>
-            </a:r>
-            <a:r>
-              <a:rPr lang="en-US" sz="2400" dirty="0" spc="-11" kern="0">
-                <a:solidFill>
-                  <a:srgbClr val="6B6A66"/>
-                </a:solidFill>
-                <a:latin typeface="Be Vietnam Pro" pitchFamily="34" charset="0"/>
-                <a:ea typeface="Be Vietnam Pro" pitchFamily="34" charset="-122"/>
-                <a:cs typeface="Be Vietnam Pro" pitchFamily="34" charset="-120"/>
-              </a:rPr>
-              <a:t> tồn</a:t>
-            </a:r>
-            <a:r>
-              <a:rPr lang="en-US" sz="2400" dirty="0" spc="-10" kern="0">
-                <a:solidFill>
-                  <a:srgbClr val="6B6A66"/>
-                </a:solidFill>
-                <a:latin typeface="Be Vietnam Pro" pitchFamily="34" charset="0"/>
-                <a:ea typeface="Be Vietnam Pro" pitchFamily="34" charset="-122"/>
-                <a:cs typeface="Be Vietnam Pro" pitchFamily="34" charset="-120"/>
-              </a:rPr>
-              <a:t> tại</a:t>
-            </a:r>
-            <a:r>
-              <a:rPr lang="en-US" sz="2400" dirty="0" spc="1" kern="0">
-                <a:solidFill>
-                  <a:srgbClr val="6B6A66"/>
-                </a:solidFill>
-                <a:latin typeface="Be Vietnam Pro" pitchFamily="34" charset="0"/>
-                <a:ea typeface="Be Vietnam Pro" pitchFamily="34" charset="-122"/>
-                <a:cs typeface="Be Vietnam Pro" pitchFamily="34" charset="-120"/>
-              </a:rPr>
-              <a:t> của</a:t>
-            </a:r>
-            <a:r>
-              <a:rPr lang="en-US" sz="2400" dirty="0" spc="-10" kern="0">
-                <a:solidFill>
-                  <a:srgbClr val="6B6A66"/>
-                </a:solidFill>
-                <a:latin typeface="Be Vietnam Pro" pitchFamily="34" charset="0"/>
-                <a:ea typeface="Be Vietnam Pro" pitchFamily="34" charset="-122"/>
-                <a:cs typeface="Be Vietnam Pro" pitchFamily="34" charset="-120"/>
-              </a:rPr>
-              <a:t> tài</a:t>
-            </a:r>
-            <a:r>
-              <a:rPr lang="en-US" sz="2400" dirty="0" spc="-2" kern="0">
-                <a:solidFill>
-                  <a:srgbClr val="6B6A66"/>
-                </a:solidFill>
-                <a:latin typeface="Be Vietnam Pro" pitchFamily="34" charset="0"/>
-                <a:ea typeface="Be Vietnam Pro" pitchFamily="34" charset="-122"/>
-                <a:cs typeface="Be Vietnam Pro" pitchFamily="34" charset="-120"/>
-              </a:rPr>
-              <a:t> liệu</a:t>
-            </a:r>
-            <a:r>
-              <a:rPr lang="en-US" sz="2400" dirty="0" spc="13" kern="0">
-                <a:solidFill>
-                  <a:srgbClr val="6B6A66"/>
-                </a:solidFill>
-                <a:latin typeface="Be Vietnam Pro" pitchFamily="34" charset="0"/>
-                <a:ea typeface="Be Vietnam Pro" pitchFamily="34" charset="-122"/>
-                <a:cs typeface="Be Vietnam Pro" pitchFamily="34" charset="-120"/>
-              </a:rPr>
-              <a:t> đổi</a:t>
-            </a:r>
-            <a:r>
-              <a:rPr lang="en-US" sz="2400" dirty="0" spc="0" kern="0">
                 <a:solidFill>
                   <a:srgbClr val="6B6A66"/>
                 </a:solidFill>
@@ -13751,7 +13432,51 @@
                 <a:ea typeface="Be Vietnam Pro" pitchFamily="34" charset="-122"/>
                 <a:cs typeface="Be Vietnam Pro" pitchFamily="34" charset="-120"/>
               </a:rPr>
-              <a:t>Các</a:t>
+              <a:t>Khóa</a:t>
+            </a:r>
+            <a:r>
+              <a:rPr lang="en-US" sz="2400" dirty="0" spc="-2" kern="0">
+                <a:solidFill>
+                  <a:srgbClr val="9AA0B5"/>
+                </a:solidFill>
+                <a:latin typeface="Be Vietnam Pro" pitchFamily="34" charset="0"/>
+                <a:ea typeface="Be Vietnam Pro" pitchFamily="34" charset="-122"/>
+                <a:cs typeface="Be Vietnam Pro" pitchFamily="34" charset="-120"/>
+              </a:rPr>
+              <a:t> học,</a:t>
+            </a:r>
+            <a:r>
+              <a:rPr lang="en-US" sz="2400" dirty="0" spc="-4" kern="0">
+                <a:solidFill>
+                  <a:srgbClr val="9AA0B5"/>
+                </a:solidFill>
+                <a:latin typeface="Be Vietnam Pro" pitchFamily="34" charset="0"/>
+                <a:ea typeface="Be Vietnam Pro" pitchFamily="34" charset="-122"/>
+                <a:cs typeface="Be Vietnam Pro" pitchFamily="34" charset="-120"/>
+              </a:rPr>
+              <a:t> sách,</a:t>
+            </a:r>
+            <a:r>
+              <a:rPr lang="en-US" sz="2400" dirty="0" spc="2" kern="0">
+                <a:solidFill>
+                  <a:srgbClr val="9AA0B5"/>
+                </a:solidFill>
+                <a:latin typeface="Be Vietnam Pro" pitchFamily="34" charset="0"/>
+                <a:ea typeface="Be Vietnam Pro" pitchFamily="34" charset="-122"/>
+                <a:cs typeface="Be Vietnam Pro" pitchFamily="34" charset="-120"/>
+              </a:rPr>
+              <a:t> phỏng</a:t>
+            </a:r>
+            <a:r>
+              <a:rPr lang="en-US" sz="2400" dirty="0" spc="-12" kern="0">
+                <a:solidFill>
+                  <a:srgbClr val="9AA0B5"/>
+                </a:solidFill>
+                <a:latin typeface="Be Vietnam Pro" pitchFamily="34" charset="0"/>
+                <a:ea typeface="Be Vietnam Pro" pitchFamily="34" charset="-122"/>
+                <a:cs typeface="Be Vietnam Pro" pitchFamily="34" charset="-120"/>
+              </a:rPr>
+              <a:t> vấn</a:t>
             </a:r>
             <a:r>
               <a:rPr lang="en-US" sz="2400" dirty="0" spc="3" kern="0">
@@ -13762,10 +13487,10 @@
                 <a:ea typeface="Be Vietnam Pro" pitchFamily="34" charset="-122"/>
                 <a:cs typeface="Be Vietnam Pro" pitchFamily="34" charset="-120"/>
               </a:rPr>
-              <a:t> mục</a:t>
-            </a:r>
-            <a:r>
-              <a:rPr lang="en-US" sz="2400" dirty="0" spc="0" kern="0">
+              <a:t> thử,</a:t>
+            </a:r>
+            <a:r>
+              <a:rPr lang="en-US" sz="2400" dirty="0" spc="-15" kern="0">
                 <a:solidFill>
                   <a:srgbClr val="9AA0B5"/>
                 </a:solidFill>
@@ -13773,10 +13498,10 @@
                 <a:ea typeface="Be Vietnam Pro" pitchFamily="34" charset="-122"/>
                 <a:cs typeface="Be Vietnam Pro" pitchFamily="34" charset="-120"/>
               </a:rPr>
-              <a:t> còn</a:t>
-            </a:r>
-            <a:r>
-              <a:rPr lang="en-US" sz="2400" dirty="0" spc="1" kern="0">
+              <a:t> tuyển</a:t>
+            </a:r>
+            <a:r>
+              <a:rPr lang="en-US" sz="2400" dirty="0" spc="3" kern="0">
                 <a:solidFill>
                   <a:srgbClr val="9AA0B5"/>
                 </a:solidFill>
@@ -13784,10 +13509,10 @@
                 <a:ea typeface="Be Vietnam Pro" pitchFamily="34" charset="-122"/>
                 <a:cs typeface="Be Vietnam Pro" pitchFamily="34" charset="-120"/>
               </a:rPr>
-              <a:t> lại của</a:t>
-            </a:r>
-            <a:r>
-              <a:rPr lang="en-US" sz="2400" dirty="0" spc="-1" kern="0">
+              <a:t> dụng:</a:t>
+            </a:r>
+            <a:r>
+              <a:rPr lang="en-US" sz="2400" dirty="0" spc="6" kern="0">
                 <a:solidFill>
                   <a:srgbClr val="9AA0B5"/>
                 </a:solidFill>
@@ -13795,128 +13520,7 @@
                 <a:ea typeface="Be Vietnam Pro" pitchFamily="34" charset="-122"/>
                 <a:cs typeface="Be Vietnam Pro" pitchFamily="34" charset="-120"/>
               </a:rPr>
-              <a:t> bài</a:t>
-            </a:r>
-            <a:r>
-              <a:rPr lang="en-US" sz="2400" dirty="0" spc="1" kern="0">
-                <a:solidFill>
-                  <a:srgbClr val="9AA0B5"/>
-                </a:solidFill>
-                <a:latin typeface="Be Vietnam Pro" pitchFamily="34" charset="0"/>
-                <a:ea typeface="Be Vietnam Pro" pitchFamily="34" charset="-122"/>
-                <a:cs typeface="Be Vietnam Pro" pitchFamily="34" charset="-120"/>
-              </a:rPr>
-              <a:t> nguồn</a:t>
-            </a:r>
-            <a:r>
-              <a:rPr lang="en-US" sz="2400" dirty="0" spc="-1" kern="0">
-                <a:solidFill>
-                  <a:srgbClr val="9AA0B5"/>
-                </a:solidFill>
-                <a:latin typeface="Be Vietnam Pro" pitchFamily="34" charset="0"/>
-                <a:ea typeface="Be Vietnam Pro" pitchFamily="34" charset="-122"/>
-                <a:cs typeface="Be Vietnam Pro" pitchFamily="34" charset="-120"/>
-              </a:rPr>
-              <a:t> (khóa</a:t>
-            </a:r>
-            <a:r>
-              <a:rPr lang="en-US" sz="2400" dirty="0" spc="-2" kern="0">
-                <a:solidFill>
-                  <a:srgbClr val="9AA0B5"/>
-                </a:solidFill>
-                <a:latin typeface="Be Vietnam Pro" pitchFamily="34" charset="0"/>
-                <a:ea typeface="Be Vietnam Pro" pitchFamily="34" charset="-122"/>
-                <a:cs typeface="Be Vietnam Pro" pitchFamily="34" charset="-120"/>
-              </a:rPr>
-              <a:t> học,</a:t>
-            </a:r>
-            <a:r>
-              <a:rPr lang="en-US" sz="2400" dirty="0" spc="-5" kern="0">
-                <a:solidFill>
-                  <a:srgbClr val="9AA0B5"/>
-                </a:solidFill>
-                <a:latin typeface="Be Vietnam Pro" pitchFamily="34" charset="0"/>
-                <a:ea typeface="Be Vietnam Pro" pitchFamily="34" charset="-122"/>
-                <a:cs typeface="Be Vietnam Pro" pitchFamily="34" charset="-120"/>
-              </a:rPr>
-              <a:t> sách,</a:t>
-            </a:r>
-            <a:r>
-              <a:rPr lang="en-US" sz="2400" dirty="0" spc="2" kern="0">
-                <a:solidFill>
-                  <a:srgbClr val="9AA0B5"/>
-                </a:solidFill>
-                <a:latin typeface="Be Vietnam Pro" pitchFamily="34" charset="0"/>
-                <a:ea typeface="Be Vietnam Pro" pitchFamily="34" charset="-122"/>
-                <a:cs typeface="Be Vietnam Pro" pitchFamily="34" charset="-120"/>
-              </a:rPr>
-              <a:t> phỏng</a:t>
-            </a:r>
-            <a:r>
-              <a:rPr lang="en-US" sz="2400" dirty="0" spc="-11" kern="0">
-                <a:solidFill>
-                  <a:srgbClr val="9AA0B5"/>
-                </a:solidFill>
-                <a:latin typeface="Be Vietnam Pro" pitchFamily="34" charset="0"/>
-                <a:ea typeface="Be Vietnam Pro" pitchFamily="34" charset="-122"/>
-                <a:cs typeface="Be Vietnam Pro" pitchFamily="34" charset="-120"/>
-              </a:rPr>
-              <a:t> vấn</a:t>
-            </a:r>
-            <a:r>
-              <a:rPr lang="en-US" sz="2400" dirty="0" spc="2" kern="0">
-                <a:solidFill>
-                  <a:srgbClr val="9AA0B5"/>
-                </a:solidFill>
-                <a:latin typeface="Be Vietnam Pro" pitchFamily="34" charset="0"/>
-                <a:ea typeface="Be Vietnam Pro" pitchFamily="34" charset="-122"/>
-                <a:cs typeface="Be Vietnam Pro" pitchFamily="34" charset="-120"/>
-              </a:rPr>
-              <a:t> thử,</a:t>
-            </a:r>
-            <a:r>
-              <a:rPr lang="en-US" sz="2400" dirty="0" spc="-14" kern="0">
-                <a:solidFill>
-                  <a:srgbClr val="9AA0B5"/>
-                </a:solidFill>
-                <a:latin typeface="Be Vietnam Pro" pitchFamily="34" charset="0"/>
-                <a:ea typeface="Be Vietnam Pro" pitchFamily="34" charset="-122"/>
-                <a:cs typeface="Be Vietnam Pro" pitchFamily="34" charset="-120"/>
-              </a:rPr>
-              <a:t> tuyển</a:t>
-            </a:r>
-            <a:r>
-              <a:rPr lang="en-US" sz="2400" dirty="0" spc="3" kern="0">
-                <a:solidFill>
-                  <a:srgbClr val="9AA0B5"/>
-                </a:solidFill>
-                <a:latin typeface="Be Vietnam Pro" pitchFamily="34" charset="0"/>
-                <a:ea typeface="Be Vietnam Pro" pitchFamily="34" charset="-122"/>
-                <a:cs typeface="Be Vietnam Pro" pitchFamily="34" charset="-120"/>
-              </a:rPr>
-              <a:t> dụng)</a:t>
-            </a:r>
-            <a:r>
-              <a:rPr lang="en-US" sz="2400" dirty="0" spc="7" kern="0">
-                <a:solidFill>
-                  <a:srgbClr val="9AA0B5"/>
-                </a:solidFill>
-                <a:latin typeface="Be Vietnam Pro" pitchFamily="34" charset="0"/>
-                <a:ea typeface="Be Vietnam Pro" pitchFamily="34" charset="-122"/>
-                <a:cs typeface="Be Vietnam Pro" pitchFamily="34" charset="-120"/>
-              </a:rPr>
               <a:t> chưa</a:t>
-            </a:r>
-            <a:r>
-              <a:rPr lang="en-US" sz="2400" dirty="0" spc="6" kern="0">
-                <a:solidFill>
-                  <a:srgbClr val="9AA0B5"/>
-                </a:solidFill>
-                <a:latin typeface="Be Vietnam Pro" pitchFamily="34" charset="0"/>
-                <a:ea typeface="Be Vietnam Pro" pitchFamily="34" charset="-122"/>
-                <a:cs typeface="Be Vietnam Pro" pitchFamily="34" charset="-120"/>
-              </a:rPr>
-              <a:t> được</a:t>
             </a:r>
             <a:r>
               <a:rPr lang="en-US" sz="2400" dirty="0" spc="0" kern="0">
@@ -16820,87 +16424,43 @@
                 <a:ea typeface="Be Vietnam Pro" pitchFamily="34" charset="-122"/>
                 <a:cs typeface="Be Vietnam Pro" pitchFamily="34" charset="-120"/>
               </a:rPr>
-              <a:t> báo</a:t>
+              <a:t> báo lỗi: 0</a:t>
+            </a:r>
+            <a:r>
+              <a:rPr lang="en-US" sz="2400" dirty="0" spc="-8" kern="0">
+                <a:solidFill>
+                  <a:srgbClr val="14161C"/>
+                </a:solidFill>
+                <a:latin typeface="Be Vietnam Pro" pitchFamily="34" charset="0"/>
+                <a:ea typeface="Be Vietnam Pro" pitchFamily="34" charset="-122"/>
+                <a:cs typeface="Be Vietnam Pro" pitchFamily="34" charset="-120"/>
+              </a:rPr>
+              <a:t> thật</a:t>
+            </a:r>
+            <a:r>
+              <a:rPr lang="en-US" sz="2400" dirty="0" spc="0" kern="0">
+                <a:solidFill>
+                  <a:srgbClr val="14161C"/>
+                </a:solidFill>
+                <a:latin typeface="Be Vietnam Pro" pitchFamily="34" charset="0"/>
+                <a:ea typeface="Be Vietnam Pro" pitchFamily="34" charset="-122"/>
+                <a:cs typeface="Be Vietnam Pro" pitchFamily="34" charset="-120"/>
+              </a:rPr>
+              <a:t> khác</a:t>
+            </a:r>
+            <a:r>
+              <a:rPr lang="en-US" sz="2400" dirty="0" spc="-11" kern="0">
+                <a:solidFill>
+                  <a:srgbClr val="14161C"/>
+                </a:solidFill>
+                <a:latin typeface="Be Vietnam Pro" pitchFamily="34" charset="0"/>
+                <a:ea typeface="Be Vietnam Pro" pitchFamily="34" charset="-122"/>
+                <a:cs typeface="Be Vietnam Pro" pitchFamily="34" charset="-120"/>
+              </a:rPr>
+              <a:t> tải</a:t>
             </a:r>
             <a:r>
               <a:rPr lang="en-US" sz="2400" dirty="0" spc="1" kern="0">
-                <a:solidFill>
-                  <a:srgbClr val="14161C"/>
-                </a:solidFill>
-                <a:latin typeface="Be Vietnam Pro" pitchFamily="34" charset="0"/>
-                <a:ea typeface="Be Vietnam Pro" pitchFamily="34" charset="-122"/>
-                <a:cs typeface="Be Vietnam Pro" pitchFamily="34" charset="-120"/>
-              </a:rPr>
-              <a:t> lỗi,</a:t>
-            </a:r>
-            <a:r>
-              <a:rPr lang="en-US" sz="2400" dirty="0" spc="0" kern="0">
-                <a:solidFill>
-                  <a:srgbClr val="14161C"/>
-                </a:solidFill>
-                <a:latin typeface="Be Vietnam Pro" pitchFamily="34" charset="0"/>
-                <a:ea typeface="Be Vietnam Pro" pitchFamily="34" charset="-122"/>
-                <a:cs typeface="Be Vietnam Pro" pitchFamily="34" charset="-120"/>
-              </a:rPr>
-              <a:t> không in</a:t>
-            </a:r>
-            <a:r>
-              <a:rPr lang="en-US" sz="2400" dirty="0" spc="-7" kern="0">
-                <a:solidFill>
-                  <a:srgbClr val="14161C"/>
-                </a:solidFill>
-                <a:latin typeface="Be Vietnam Pro" pitchFamily="34" charset="0"/>
-                <a:ea typeface="Be Vietnam Pro" pitchFamily="34" charset="-122"/>
-                <a:cs typeface="Be Vietnam Pro" pitchFamily="34" charset="-120"/>
-              </a:rPr>
-              <a:t> số:</a:t>
-            </a:r>
-            <a:r>
-              <a:rPr lang="en-US" sz="2400" dirty="0" spc="0" kern="0">
-                <a:solidFill>
-                  <a:srgbClr val="14161C"/>
-                </a:solidFill>
-                <a:latin typeface="Be Vietnam Pro" pitchFamily="34" charset="0"/>
-                <a:ea typeface="Be Vietnam Pro" pitchFamily="34" charset="-122"/>
-                <a:cs typeface="Be Vietnam Pro" pitchFamily="34" charset="-120"/>
-              </a:rPr>
-              <a:t> 0</a:t>
-            </a:r>
-            <a:r>
-              <a:rPr lang="en-US" sz="2400" dirty="0" spc="-7" kern="0">
-                <a:solidFill>
-                  <a:srgbClr val="14161C"/>
-                </a:solidFill>
-                <a:latin typeface="Be Vietnam Pro" pitchFamily="34" charset="0"/>
-                <a:ea typeface="Be Vietnam Pro" pitchFamily="34" charset="-122"/>
-                <a:cs typeface="Be Vietnam Pro" pitchFamily="34" charset="-120"/>
-              </a:rPr>
-              <a:t> thật</a:t>
-            </a:r>
-            <a:r>
-              <a:rPr lang="en-US" sz="2400" dirty="0" spc="-1" kern="0">
-                <a:solidFill>
-                  <a:srgbClr val="14161C"/>
-                </a:solidFill>
-                <a:latin typeface="Be Vietnam Pro" pitchFamily="34" charset="0"/>
-                <a:ea typeface="Be Vietnam Pro" pitchFamily="34" charset="-122"/>
-                <a:cs typeface="Be Vietnam Pro" pitchFamily="34" charset="-120"/>
-              </a:rPr>
-              <a:t> khác</a:t>
-            </a:r>
-            <a:r>
-              <a:rPr lang="en-US" sz="2400" dirty="0" spc="-11" kern="0">
-                <a:solidFill>
-                  <a:srgbClr val="14161C"/>
-                </a:solidFill>
-                <a:latin typeface="Be Vietnam Pro" pitchFamily="34" charset="0"/>
-                <a:ea typeface="Be Vietnam Pro" pitchFamily="34" charset="-122"/>
-                <a:cs typeface="Be Vietnam Pro" pitchFamily="34" charset="-120"/>
-              </a:rPr>
-              <a:t> tải</a:t>
-            </a:r>
-            <a:r>
-              <a:rPr lang="en-US" sz="2400" dirty="0" spc="2" kern="0">
                 <a:solidFill>
                   <a:srgbClr val="14161C"/>
                 </a:solidFill>
@@ -17063,7 +16623,7 @@
               <a:t> mảng;</a:t>
             </a:r>
             <a:r>
-              <a:rPr lang="en-US" sz="2400" dirty="0" spc="-1" kern="0">
+              <a:rPr lang="en-US" sz="2400" dirty="0" spc="0" kern="0">
                 <a:solidFill>
                   <a:srgbClr val="14161C"/>
                 </a:solidFill>
@@ -17071,10 +16631,10 @@
                 <a:ea typeface="Be Vietnam Pro" pitchFamily="34" charset="-122"/>
                 <a:cs typeface="Be Vietnam Pro" pitchFamily="34" charset="-120"/>
               </a:rPr>
-              <a:t> bài chỉ</a:t>
-            </a:r>
-            <a:r>
-              <a:rPr lang="en-US" sz="2400" dirty="0" spc="2" kern="0">
+              <a:t> chỉ</a:t>
+            </a:r>
+            <a:r>
+              <a:rPr lang="en-US" sz="2400" dirty="0" spc="1" kern="0">
                 <a:solidFill>
                   <a:srgbClr val="14161C"/>
                 </a:solidFill>
@@ -17085,7 +16645,7 @@
               <a:t> phân</a:t>
             </a:r>
             <a:r>
-              <a:rPr lang="en-US" sz="2400" dirty="0" spc="-1" kern="0">
+              <a:rPr lang="en-US" sz="2400" dirty="0" spc="0" kern="0">
                 <a:solidFill>
                   <a:srgbClr val="14161C"/>
                 </a:solidFill>
@@ -17094,17 +16654,6 @@
                 <a:cs typeface="Be Vietnam Pro" pitchFamily="34" charset="-120"/>
               </a:rPr>
               <a:t> tích</a:t>
-            </a:r>
-            <a:r>
-              <a:rPr lang="en-US" sz="2400" dirty="0" spc="0" kern="0">
-                <a:solidFill>
-                  <a:srgbClr val="14161C"/>
-                </a:solidFill>
-                <a:latin typeface="Be Vietnam Pro" pitchFamily="34" charset="0"/>
-                <a:ea typeface="Be Vietnam Pro" pitchFamily="34" charset="-122"/>
-                <a:cs typeface="Be Vietnam Pro" pitchFamily="34" charset="-120"/>
-              </a:rPr>
-              <a:t> các</a:t>
             </a:r>
             <a:r>
               <a:rPr lang="en-US" sz="2400" dirty="0" spc="3" kern="0">
@@ -17201,7 +16750,7 @@
               <a:t> đổi</a:t>
             </a:r>
             <a:r>
-              <a:rPr lang="en-US" sz="1950" dirty="0" spc="-1" kern="0">
+              <a:rPr lang="en-US" sz="1950" dirty="0" spc="0" kern="0">
                 <a:solidFill>
                   <a:srgbClr val="6B6A66"/>
                 </a:solidFill>
@@ -17209,10 +16758,10 @@
                 <a:ea typeface="Be Vietnam Pro" pitchFamily="34" charset="-122"/>
                 <a:cs typeface="Be Vietnam Pro" pitchFamily="34" charset="-120"/>
               </a:rPr>
-              <a:t> theo</a:t>
-            </a:r>
-            <a:r>
-              <a:rPr lang="en-US" sz="1950" dirty="0" spc="-2" kern="0">
+              <a:t> dần,</a:t>
+            </a:r>
+            <a:r>
+              <a:rPr lang="en-US" sz="1950" dirty="0" spc="-29" kern="0">
                 <a:solidFill>
                   <a:srgbClr val="6B6A66"/>
                 </a:solidFill>
@@ -17220,10 +16769,10 @@
                 <a:ea typeface="Be Vietnam Pro" pitchFamily="34" charset="-122"/>
                 <a:cs typeface="Be Vietnam Pro" pitchFamily="34" charset="-120"/>
               </a:rPr>
-              <a:t> thời</a:t>
-            </a:r>
-            <a:r>
-              <a:rPr lang="en-US" sz="1950" dirty="0" spc="3" kern="0">
+              <a:t> kết</a:t>
+            </a:r>
+            <a:r>
+              <a:rPr lang="en-US" sz="1950" dirty="0" spc="0" kern="0">
                 <a:solidFill>
                   <a:srgbClr val="6B6A66"/>
                 </a:solidFill>
@@ -17231,10 +16780,10 @@
                 <a:ea typeface="Be Vietnam Pro" pitchFamily="34" charset="-122"/>
                 <a:cs typeface="Be Vietnam Pro" pitchFamily="34" charset="-120"/>
               </a:rPr>
-              <a:t> gian,</a:t>
-            </a:r>
-            <a:r>
-              <a:rPr lang="en-US" sz="1950" dirty="0" spc="-29" kern="0">
+              <a:t> quả</a:t>
+            </a:r>
+            <a:r>
+              <a:rPr lang="en-US" sz="1950" dirty="0" spc="-4" kern="0">
                 <a:solidFill>
                   <a:srgbClr val="6B6A66"/>
                 </a:solidFill>
@@ -17242,29 +16791,7 @@
                 <a:ea typeface="Be Vietnam Pro" pitchFamily="34" charset="-122"/>
                 <a:cs typeface="Be Vietnam Pro" pitchFamily="34" charset="-120"/>
               </a:rPr>
-              <a:t> kết</a:t>
-            </a:r>
-            <a:r>
-              <a:rPr lang="en-US" sz="1950" dirty="0" spc="-1" kern="0">
-                <a:solidFill>
-                  <a:srgbClr val="6B6A66"/>
-                </a:solidFill>
-                <a:latin typeface="Be Vietnam Pro" pitchFamily="34" charset="0"/>
-                <a:ea typeface="Be Vietnam Pro" pitchFamily="34" charset="-122"/>
-                <a:cs typeface="Be Vietnam Pro" pitchFamily="34" charset="-120"/>
-              </a:rPr>
-              <a:t> quả của</a:t>
-            </a:r>
-            <a:r>
-              <a:rPr lang="en-US" sz="1950" dirty="0" spc="-3" kern="0">
-                <a:solidFill>
-                  <a:srgbClr val="6B6A66"/>
-                </a:solidFill>
-                <a:latin typeface="Be Vietnam Pro" pitchFamily="34" charset="0"/>
-                <a:ea typeface="Be Vietnam Pro" pitchFamily="34" charset="-122"/>
-                <a:cs typeface="Be Vietnam Pro" pitchFamily="34" charset="-120"/>
-              </a:rPr>
-              <a:t> bạn có</a:t>
+              <a:t> có</a:t>
             </a:r>
             <a:r>
               <a:rPr lang="en-US" sz="1950" dirty="0" spc="-1" kern="0">

--- a/system-design-101/vi/lessons/sd-05-005/slides/sd-05-005.pptx
+++ b/system-design-101/vi/lessons/sd-05-005/slides/sd-05-005.pptx
@@ -2187,7 +2187,7 @@
               <a:buNone/>
             </a:pPr>
             <a:r>
-              <a:rPr lang="en-US" sz="2400" b="1" dirty="0" spc="-44" kern="0">
+              <a:rPr lang="en-US" sz="2400" b="1" dirty="0" spc="-8" kern="0">
                 <a:solidFill>
                   <a:srgbClr val="F3EEE3"/>
                 </a:solidFill>
@@ -2195,10 +2195,10 @@
                 <a:ea typeface="Be Vietnam Pro" pitchFamily="34" charset="-122"/>
                 <a:cs typeface="Be Vietnam Pro" pitchFamily="34" charset="-120"/>
               </a:rPr>
-              <a:t>Vòng</a:t>
-            </a:r>
-            <a:r>
-              <a:rPr lang="en-US" sz="2400" b="1" dirty="0" spc="2" kern="0">
+              <a:t>Chọn</a:t>
+            </a:r>
+            <a:r>
+              <a:rPr lang="en-US" sz="2400" b="1" dirty="0" spc="-19" kern="0">
                 <a:solidFill>
                   <a:srgbClr val="F3EEE3"/>
                 </a:solidFill>
@@ -2206,7 +2206,7 @@
                 <a:ea typeface="Be Vietnam Pro" pitchFamily="34" charset="-122"/>
                 <a:cs typeface="Be Vietnam Pro" pitchFamily="34" charset="-120"/>
               </a:rPr>
-              <a:t> nào</a:t>
+              <a:t> vòng</a:t>
             </a:r>
             <a:r>
               <a:rPr lang="en-US" sz="2400" b="1" dirty="0" spc="9" kern="0">
@@ -2217,7 +2217,7 @@
                 <a:ea typeface="Be Vietnam Pro" pitchFamily="34" charset="-122"/>
                 <a:cs typeface="Be Vietnam Pro" pitchFamily="34" charset="-120"/>
               </a:rPr>
-              <a:t> trước,</a:t>
+              <a:t> trước;</a:t>
             </a:r>
             <a:r>
               <a:rPr lang="en-US" sz="2400" b="1" dirty="0" spc="-3" kern="0">
@@ -2228,10 +2228,10 @@
                 <a:ea typeface="Be Vietnam Pro" pitchFamily="34" charset="-122"/>
                 <a:cs typeface="Be Vietnam Pro" pitchFamily="34" charset="-120"/>
               </a:rPr>
-              <a:t> tài</a:t>
-            </a:r>
-            <a:r>
-              <a:rPr lang="en-US" sz="2400" b="1" dirty="0" spc="0" kern="0">
+              <a:t> mỗi</a:t>
+            </a:r>
+            <a:r>
+              <a:rPr lang="en-US" sz="2400" b="1" dirty="0" spc="-18" kern="0">
                 <a:solidFill>
                   <a:srgbClr val="F3EEE3"/>
                 </a:solidFill>
@@ -2239,10 +2239,10 @@
                 <a:ea typeface="Be Vietnam Pro" pitchFamily="34" charset="-122"/>
                 <a:cs typeface="Be Vietnam Pro" pitchFamily="34" charset="-120"/>
               </a:rPr>
-              <a:t> liệu</a:t>
-            </a:r>
-            <a:r>
-              <a:rPr lang="en-US" sz="2400" b="1" dirty="0" spc="3" kern="0">
+              <a:t> vòng</a:t>
+            </a:r>
+            <a:r>
+              <a:rPr lang="en-US" sz="2400" b="1" dirty="0" spc="-17" kern="0">
                 <a:solidFill>
                   <a:srgbClr val="F3EEE3"/>
                 </a:solidFill>
@@ -2250,7 +2250,29 @@
                 <a:ea typeface="Be Vietnam Pro" pitchFamily="34" charset="-122"/>
                 <a:cs typeface="Be Vietnam Pro" pitchFamily="34" charset="-120"/>
               </a:rPr>
-              <a:t> sau</a:t>
+              <a:t> luyện</a:t>
+            </a:r>
+            <a:r>
+              <a:rPr lang="en-US" sz="2400" b="1" dirty="0" spc="-7" kern="0">
+                <a:solidFill>
+                  <a:srgbClr val="F3EEE3"/>
+                </a:solidFill>
+                <a:latin typeface="Be Vietnam Pro" pitchFamily="34" charset="0"/>
+                <a:ea typeface="Be Vietnam Pro" pitchFamily="34" charset="-122"/>
+                <a:cs typeface="Be Vietnam Pro" pitchFamily="34" charset="-120"/>
+              </a:rPr>
+              <a:t> một</a:t>
+            </a:r>
+            <a:r>
+              <a:rPr lang="en-US" sz="2400" b="1" dirty="0" spc="-1" kern="0">
+                <a:solidFill>
+                  <a:srgbClr val="F3EEE3"/>
+                </a:solidFill>
+                <a:latin typeface="Be Vietnam Pro" pitchFamily="34" charset="0"/>
+                <a:ea typeface="Be Vietnam Pro" pitchFamily="34" charset="-122"/>
+                <a:cs typeface="Be Vietnam Pro" pitchFamily="34" charset="-120"/>
+              </a:rPr>
+              <a:t> kiểu</a:t>
             </a:r>
             <a:endParaRPr lang="en-US" sz="2400" dirty="0"/>
           </a:p>
